--- a/from_linear_regression_to_gpt - LLM Security.pptx
+++ b/from_linear_regression_to_gpt - LLM Security.pptx
@@ -54,7 +54,7 @@
       </p:grpSpPr>
       <p:sp>
         <p:nvSpPr>
-          <p:cNvPr id="1668551302" name="Header Placeholder"/>
+          <p:cNvPr id="762788921" name="Header Placeholder"/>
           <p:cNvSpPr/>
           <p:nvPr>
             <p:ph type="hdr" sz="quarter"/>
@@ -78,7 +78,7 @@
       </p:sp>
       <p:sp>
         <p:nvSpPr>
-          <p:cNvPr id="112585666" name="Date Placeholder"/>
+          <p:cNvPr id="783218440" name="Date Placeholder"/>
           <p:cNvSpPr/>
           <p:nvPr>
             <p:ph type="dt" sz="quarter" idx="1"/>
@@ -102,7 +102,7 @@
       </p:sp>
       <p:sp>
         <p:nvSpPr>
-          <p:cNvPr id="613195623" name="Slide Image Placeholder"/>
+          <p:cNvPr id="476007485" name="Slide Image Placeholder"/>
           <p:cNvSpPr/>
           <p:nvPr>
             <p:ph type="sldImg" idx="2"/>
@@ -126,7 +126,7 @@
       </p:sp>
       <p:sp>
         <p:nvSpPr>
-          <p:cNvPr id="820859381" name="Notes Placeholder"/>
+          <p:cNvPr id="2015650923" name="Notes Placeholder"/>
           <p:cNvSpPr/>
           <p:nvPr>
             <p:ph type="body" sz="quarter" idx="3"/>
@@ -150,7 +150,7 @@
       </p:sp>
       <p:sp>
         <p:nvSpPr>
-          <p:cNvPr id="449957818" name="Footer Placeholder"/>
+          <p:cNvPr id="475392444" name="Footer Placeholder"/>
           <p:cNvSpPr/>
           <p:nvPr>
             <p:ph type="ftr" sz="quarter" idx="4"/>
@@ -174,7 +174,7 @@
       </p:sp>
       <p:sp>
         <p:nvSpPr>
-          <p:cNvPr id="736926003" name="Slide Number Placeholder"/>
+          <p:cNvPr id="1547442843" name="Slide Number Placeholder"/>
           <p:cNvSpPr/>
           <p:nvPr>
             <p:ph type="sldNum" sz="quarter" idx="5"/>
@@ -226,7 +226,7 @@
       </p:grpSpPr>
       <p:sp>
         <p:nvSpPr>
-          <p:cNvPr id="274499914" name="Slide Image Placeholder 1"/>
+          <p:cNvPr id="1530597948" name="Slide Image Placeholder 1"/>
           <p:cNvSpPr>
             <a:spLocks noGrp="1"/>
           </p:cNvSpPr>
@@ -238,7 +238,7 @@
       </p:sp>
       <p:sp>
         <p:nvSpPr>
-          <p:cNvPr id="264167667" name="Notes Placeholder 2"/>
+          <p:cNvPr id="1407685132" name="Notes Placeholder 2"/>
           <p:cNvSpPr>
             <a:spLocks noGrp="1"/>
           </p:cNvSpPr>
@@ -276,7 +276,7 @@
       </p:sp>
       <p:sp>
         <p:nvSpPr>
-          <p:cNvPr id="768979183" name="Slide Number Placeholder 3"/>
+          <p:cNvPr id="2134931649" name="Slide Number Placeholder 3"/>
           <p:cNvSpPr>
             <a:spLocks noGrp="1"/>
           </p:cNvSpPr>
@@ -323,7 +323,7 @@
       </p:grpSpPr>
       <p:sp>
         <p:nvSpPr>
-          <p:cNvPr id="255653218" name="Slide Image Placeholder 1"/>
+          <p:cNvPr id="555622775" name="Slide Image Placeholder 1"/>
           <p:cNvSpPr>
             <a:spLocks noGrp="1"/>
           </p:cNvSpPr>
@@ -335,7 +335,7 @@
       </p:sp>
       <p:sp>
         <p:nvSpPr>
-          <p:cNvPr id="759547543" name="Notes Placeholder 2"/>
+          <p:cNvPr id="1836469114" name="Notes Placeholder 2"/>
           <p:cNvSpPr>
             <a:spLocks noGrp="1"/>
           </p:cNvSpPr>
@@ -406,7 +406,7 @@
       </p:sp>
       <p:sp>
         <p:nvSpPr>
-          <p:cNvPr id="1778997538" name="Slide Number Placeholder 3"/>
+          <p:cNvPr id="41136140" name="Slide Number Placeholder 3"/>
           <p:cNvSpPr>
             <a:spLocks noGrp="1"/>
           </p:cNvSpPr>
@@ -453,7 +453,7 @@
       </p:grpSpPr>
       <p:sp>
         <p:nvSpPr>
-          <p:cNvPr id="1697368400" name="Slide Image Placeholder 1"/>
+          <p:cNvPr id="900295750" name="Slide Image Placeholder 1"/>
           <p:cNvSpPr>
             <a:spLocks noGrp="1"/>
           </p:cNvSpPr>
@@ -465,7 +465,7 @@
       </p:sp>
       <p:sp>
         <p:nvSpPr>
-          <p:cNvPr id="862475619" name="Notes Placeholder 2"/>
+          <p:cNvPr id="2065068410" name="Notes Placeholder 2"/>
           <p:cNvSpPr>
             <a:spLocks noGrp="1"/>
           </p:cNvSpPr>
@@ -525,7 +525,7 @@
       </p:sp>
       <p:sp>
         <p:nvSpPr>
-          <p:cNvPr id="1119509459" name="Slide Number Placeholder 3"/>
+          <p:cNvPr id="1658744228" name="Slide Number Placeholder 3"/>
           <p:cNvSpPr>
             <a:spLocks noGrp="1"/>
           </p:cNvSpPr>
@@ -572,7 +572,7 @@
       </p:grpSpPr>
       <p:sp>
         <p:nvSpPr>
-          <p:cNvPr id="930892672" name="Slide Image Placeholder 1"/>
+          <p:cNvPr id="1624419579" name="Slide Image Placeholder 1"/>
           <p:cNvSpPr>
             <a:spLocks noGrp="1"/>
           </p:cNvSpPr>
@@ -584,7 +584,7 @@
       </p:sp>
       <p:sp>
         <p:nvSpPr>
-          <p:cNvPr id="37421041" name="Notes Placeholder 2"/>
+          <p:cNvPr id="1523117930" name="Notes Placeholder 2"/>
           <p:cNvSpPr>
             <a:spLocks noGrp="1"/>
           </p:cNvSpPr>
@@ -644,7 +644,7 @@
       </p:sp>
       <p:sp>
         <p:nvSpPr>
-          <p:cNvPr id="1022958254" name="Slide Number Placeholder 3"/>
+          <p:cNvPr id="292762197" name="Slide Number Placeholder 3"/>
           <p:cNvSpPr>
             <a:spLocks noGrp="1"/>
           </p:cNvSpPr>
@@ -691,7 +691,7 @@
       </p:grpSpPr>
       <p:sp>
         <p:nvSpPr>
-          <p:cNvPr id="620363767" name="Slide Image Placeholder 1"/>
+          <p:cNvPr id="1386094750" name="Slide Image Placeholder 1"/>
           <p:cNvSpPr>
             <a:spLocks noGrp="1"/>
           </p:cNvSpPr>
@@ -703,7 +703,7 @@
       </p:sp>
       <p:sp>
         <p:nvSpPr>
-          <p:cNvPr id="1727228837" name="Notes Placeholder 2"/>
+          <p:cNvPr id="1878992124" name="Notes Placeholder 2"/>
           <p:cNvSpPr>
             <a:spLocks noGrp="1"/>
           </p:cNvSpPr>
@@ -741,7 +741,7 @@
       </p:sp>
       <p:sp>
         <p:nvSpPr>
-          <p:cNvPr id="565459178" name="Slide Number Placeholder 3"/>
+          <p:cNvPr id="1800302734" name="Slide Number Placeholder 3"/>
           <p:cNvSpPr>
             <a:spLocks noGrp="1"/>
           </p:cNvSpPr>
@@ -788,7 +788,7 @@
       </p:grpSpPr>
       <p:sp>
         <p:nvSpPr>
-          <p:cNvPr id="2044511453" name="Slide Image Placeholder 1"/>
+          <p:cNvPr id="1449125262" name="Slide Image Placeholder 1"/>
           <p:cNvSpPr>
             <a:spLocks noGrp="1"/>
           </p:cNvSpPr>
@@ -800,7 +800,7 @@
       </p:sp>
       <p:sp>
         <p:nvSpPr>
-          <p:cNvPr id="1200381784" name="Notes Placeholder 2"/>
+          <p:cNvPr id="1372982824" name="Notes Placeholder 2"/>
           <p:cNvSpPr>
             <a:spLocks noGrp="1"/>
           </p:cNvSpPr>
@@ -860,7 +860,7 @@
       </p:sp>
       <p:sp>
         <p:nvSpPr>
-          <p:cNvPr id="195027307" name="Slide Number Placeholder 3"/>
+          <p:cNvPr id="52227787" name="Slide Number Placeholder 3"/>
           <p:cNvSpPr>
             <a:spLocks noGrp="1"/>
           </p:cNvSpPr>
@@ -907,7 +907,7 @@
       </p:grpSpPr>
       <p:sp>
         <p:nvSpPr>
-          <p:cNvPr id="1932518533" name="Slide Image Placeholder 1"/>
+          <p:cNvPr id="1781372703" name="Slide Image Placeholder 1"/>
           <p:cNvSpPr>
             <a:spLocks noGrp="1"/>
           </p:cNvSpPr>
@@ -919,7 +919,7 @@
       </p:sp>
       <p:sp>
         <p:nvSpPr>
-          <p:cNvPr id="1043028386" name="Notes Placeholder 2"/>
+          <p:cNvPr id="1860119627" name="Notes Placeholder 2"/>
           <p:cNvSpPr>
             <a:spLocks noGrp="1"/>
           </p:cNvSpPr>
@@ -968,7 +968,7 @@
       </p:sp>
       <p:sp>
         <p:nvSpPr>
-          <p:cNvPr id="1043000070" name="Slide Number Placeholder 3"/>
+          <p:cNvPr id="538570695" name="Slide Number Placeholder 3"/>
           <p:cNvSpPr>
             <a:spLocks noGrp="1"/>
           </p:cNvSpPr>
@@ -1015,7 +1015,7 @@
       </p:grpSpPr>
       <p:sp>
         <p:nvSpPr>
-          <p:cNvPr id="1069272730" name="Slide Image Placeholder 1"/>
+          <p:cNvPr id="1023300129" name="Slide Image Placeholder 1"/>
           <p:cNvSpPr>
             <a:spLocks noGrp="1"/>
           </p:cNvSpPr>
@@ -1027,7 +1027,7 @@
       </p:sp>
       <p:sp>
         <p:nvSpPr>
-          <p:cNvPr id="2004540408" name="Notes Placeholder 2"/>
+          <p:cNvPr id="275945380" name="Notes Placeholder 2"/>
           <p:cNvSpPr>
             <a:spLocks noGrp="1"/>
           </p:cNvSpPr>
@@ -1076,7 +1076,7 @@
       </p:sp>
       <p:sp>
         <p:nvSpPr>
-          <p:cNvPr id="1581097358" name="Slide Number Placeholder 3"/>
+          <p:cNvPr id="2051778026" name="Slide Number Placeholder 3"/>
           <p:cNvSpPr>
             <a:spLocks noGrp="1"/>
           </p:cNvSpPr>
@@ -1123,7 +1123,7 @@
       </p:grpSpPr>
       <p:sp>
         <p:nvSpPr>
-          <p:cNvPr id="797161194" name="Slide Image Placeholder 1"/>
+          <p:cNvPr id="807448504" name="Slide Image Placeholder 1"/>
           <p:cNvSpPr>
             <a:spLocks noGrp="1"/>
           </p:cNvSpPr>
@@ -1135,7 +1135,7 @@
       </p:sp>
       <p:sp>
         <p:nvSpPr>
-          <p:cNvPr id="1497523270" name="Notes Placeholder 2"/>
+          <p:cNvPr id="1000336810" name="Notes Placeholder 2"/>
           <p:cNvSpPr>
             <a:spLocks noGrp="1"/>
           </p:cNvSpPr>
@@ -1184,7 +1184,7 @@
       </p:sp>
       <p:sp>
         <p:nvSpPr>
-          <p:cNvPr id="2026525031" name="Slide Number Placeholder 3"/>
+          <p:cNvPr id="507738969" name="Slide Number Placeholder 3"/>
           <p:cNvSpPr>
             <a:spLocks noGrp="1"/>
           </p:cNvSpPr>
@@ -1231,7 +1231,7 @@
       </p:grpSpPr>
       <p:sp>
         <p:nvSpPr>
-          <p:cNvPr id="969821148" name="Slide Image Placeholder 1"/>
+          <p:cNvPr id="600596435" name="Slide Image Placeholder 1"/>
           <p:cNvSpPr>
             <a:spLocks noGrp="1"/>
           </p:cNvSpPr>
@@ -1243,7 +1243,7 @@
       </p:sp>
       <p:sp>
         <p:nvSpPr>
-          <p:cNvPr id="1254341542" name="Notes Placeholder 2"/>
+          <p:cNvPr id="1954659809" name="Notes Placeholder 2"/>
           <p:cNvSpPr>
             <a:spLocks noGrp="1"/>
           </p:cNvSpPr>
@@ -1292,7 +1292,7 @@
       </p:sp>
       <p:sp>
         <p:nvSpPr>
-          <p:cNvPr id="456026013" name="Slide Number Placeholder 3"/>
+          <p:cNvPr id="1578132785" name="Slide Number Placeholder 3"/>
           <p:cNvSpPr>
             <a:spLocks noGrp="1"/>
           </p:cNvSpPr>
@@ -1339,7 +1339,7 @@
       </p:grpSpPr>
       <p:sp>
         <p:nvSpPr>
-          <p:cNvPr id="1392746763" name="Slide Image Placeholder 1"/>
+          <p:cNvPr id="1610086985" name="Slide Image Placeholder 1"/>
           <p:cNvSpPr>
             <a:spLocks noGrp="1"/>
           </p:cNvSpPr>
@@ -1351,7 +1351,7 @@
       </p:sp>
       <p:sp>
         <p:nvSpPr>
-          <p:cNvPr id="153493918" name="Notes Placeholder 2"/>
+          <p:cNvPr id="986681197" name="Notes Placeholder 2"/>
           <p:cNvSpPr>
             <a:spLocks noGrp="1"/>
           </p:cNvSpPr>
@@ -1411,7 +1411,7 @@
       </p:sp>
       <p:sp>
         <p:nvSpPr>
-          <p:cNvPr id="199893443" name="Slide Number Placeholder 3"/>
+          <p:cNvPr id="424185172" name="Slide Number Placeholder 3"/>
           <p:cNvSpPr>
             <a:spLocks noGrp="1"/>
           </p:cNvSpPr>
@@ -1458,7 +1458,7 @@
       </p:grpSpPr>
       <p:sp>
         <p:nvSpPr>
-          <p:cNvPr id="143621932" name="Slide Image Placeholder 1"/>
+          <p:cNvPr id="502701355" name="Slide Image Placeholder 1"/>
           <p:cNvSpPr>
             <a:spLocks noGrp="1"/>
           </p:cNvSpPr>
@@ -1470,7 +1470,7 @@
       </p:sp>
       <p:sp>
         <p:nvSpPr>
-          <p:cNvPr id="1242587324" name="Notes Placeholder 2"/>
+          <p:cNvPr id="954797122" name="Notes Placeholder 2"/>
           <p:cNvSpPr>
             <a:spLocks noGrp="1"/>
           </p:cNvSpPr>
@@ -1519,7 +1519,7 @@
       </p:sp>
       <p:sp>
         <p:nvSpPr>
-          <p:cNvPr id="1946333948" name="Slide Number Placeholder 3"/>
+          <p:cNvPr id="1400297075" name="Slide Number Placeholder 3"/>
           <p:cNvSpPr>
             <a:spLocks noGrp="1"/>
           </p:cNvSpPr>
@@ -1566,7 +1566,7 @@
       </p:grpSpPr>
       <p:sp>
         <p:nvSpPr>
-          <p:cNvPr id="293624447" name="Slide Image Placeholder 1"/>
+          <p:cNvPr id="530854561" name="Slide Image Placeholder 1"/>
           <p:cNvSpPr>
             <a:spLocks noGrp="1"/>
           </p:cNvSpPr>
@@ -1578,7 +1578,7 @@
       </p:sp>
       <p:sp>
         <p:nvSpPr>
-          <p:cNvPr id="352972465" name="Notes Placeholder 2"/>
+          <p:cNvPr id="789776187" name="Notes Placeholder 2"/>
           <p:cNvSpPr>
             <a:spLocks noGrp="1"/>
           </p:cNvSpPr>
@@ -1627,7 +1627,7 @@
       </p:sp>
       <p:sp>
         <p:nvSpPr>
-          <p:cNvPr id="1379866622" name="Slide Number Placeholder 3"/>
+          <p:cNvPr id="1885331601" name="Slide Number Placeholder 3"/>
           <p:cNvSpPr>
             <a:spLocks noGrp="1"/>
           </p:cNvSpPr>
@@ -1674,7 +1674,7 @@
       </p:grpSpPr>
       <p:sp>
         <p:nvSpPr>
-          <p:cNvPr id="1321026774" name="Slide Image Placeholder 1"/>
+          <p:cNvPr id="678420027" name="Slide Image Placeholder 1"/>
           <p:cNvSpPr>
             <a:spLocks noGrp="1"/>
           </p:cNvSpPr>
@@ -1686,7 +1686,7 @@
       </p:sp>
       <p:sp>
         <p:nvSpPr>
-          <p:cNvPr id="1134001892" name="Notes Placeholder 2"/>
+          <p:cNvPr id="1830803133" name="Notes Placeholder 2"/>
           <p:cNvSpPr>
             <a:spLocks noGrp="1"/>
           </p:cNvSpPr>
@@ -1735,7 +1735,7 @@
       </p:sp>
       <p:sp>
         <p:nvSpPr>
-          <p:cNvPr id="1187032015" name="Slide Number Placeholder 3"/>
+          <p:cNvPr id="598985426" name="Slide Number Placeholder 3"/>
           <p:cNvSpPr>
             <a:spLocks noGrp="1"/>
           </p:cNvSpPr>
@@ -1782,7 +1782,7 @@
       </p:grpSpPr>
       <p:sp>
         <p:nvSpPr>
-          <p:cNvPr id="2032235400" name="Slide Image Placeholder 1"/>
+          <p:cNvPr id="1823826567" name="Slide Image Placeholder 1"/>
           <p:cNvSpPr>
             <a:spLocks noGrp="1"/>
           </p:cNvSpPr>
@@ -1794,7 +1794,7 @@
       </p:sp>
       <p:sp>
         <p:nvSpPr>
-          <p:cNvPr id="1063848119" name="Notes Placeholder 2"/>
+          <p:cNvPr id="557046427" name="Notes Placeholder 2"/>
           <p:cNvSpPr>
             <a:spLocks noGrp="1"/>
           </p:cNvSpPr>
@@ -1931,7 +1931,7 @@
       </p:sp>
       <p:sp>
         <p:nvSpPr>
-          <p:cNvPr id="1794181233" name="Slide Number Placeholder 3"/>
+          <p:cNvPr id="334754047" name="Slide Number Placeholder 3"/>
           <p:cNvSpPr>
             <a:spLocks noGrp="1"/>
           </p:cNvSpPr>
@@ -1978,7 +1978,7 @@
       </p:grpSpPr>
       <p:sp>
         <p:nvSpPr>
-          <p:cNvPr id="1722523532" name="Slide Image Placeholder 1"/>
+          <p:cNvPr id="597467523" name="Slide Image Placeholder 1"/>
           <p:cNvSpPr>
             <a:spLocks noGrp="1"/>
           </p:cNvSpPr>
@@ -1990,7 +1990,7 @@
       </p:sp>
       <p:sp>
         <p:nvSpPr>
-          <p:cNvPr id="511791859" name="Notes Placeholder 2"/>
+          <p:cNvPr id="20373315" name="Notes Placeholder 2"/>
           <p:cNvSpPr>
             <a:spLocks noGrp="1"/>
           </p:cNvSpPr>
@@ -2039,7 +2039,7 @@
       </p:sp>
       <p:sp>
         <p:nvSpPr>
-          <p:cNvPr id="1406391755" name="Slide Number Placeholder 3"/>
+          <p:cNvPr id="1155406310" name="Slide Number Placeholder 3"/>
           <p:cNvSpPr>
             <a:spLocks noGrp="1"/>
           </p:cNvSpPr>
@@ -2086,7 +2086,7 @@
       </p:grpSpPr>
       <p:pic>
         <p:nvPicPr>
-          <p:cNvPr id="993258645" name="Picture 2116695055"/>
+          <p:cNvPr id="293712423" name="Picture 2116695055"/>
           <p:cNvPicPr>
             <a:picLocks noChangeAspect="1"/>
           </p:cNvPicPr>
@@ -2110,7 +2110,7 @@
       </p:pic>
       <p:sp>
         <p:nvSpPr>
-          <p:cNvPr id="521679558" name="Rectangle 376226509"/>
+          <p:cNvPr id="10381021" name="Rectangle 376226509"/>
           <p:cNvSpPr>
             <a:spLocks noGrp="1"/>
           </p:cNvSpPr>
@@ -2175,7 +2175,7 @@
       </p:sp>
       <p:sp>
         <p:nvSpPr>
-          <p:cNvPr id="388305761" name="Title 1"/>
+          <p:cNvPr id="1058204696" name="Title 1"/>
           <p:cNvSpPr>
             <a:spLocks noGrp="1"/>
           </p:cNvSpPr>
@@ -2216,7 +2216,7 @@
       </p:sp>
       <p:sp>
         <p:nvSpPr>
-          <p:cNvPr id="1001142577" name="Subtitle 2"/>
+          <p:cNvPr id="795500823" name="Subtitle 2"/>
           <p:cNvSpPr>
             <a:spLocks noGrp="1"/>
           </p:cNvSpPr>
@@ -2291,7 +2291,7 @@
       </p:sp>
       <p:sp>
         <p:nvSpPr>
-          <p:cNvPr id="218935560" name="Date Placeholder 3"/>
+          <p:cNvPr id="822645226" name="Date Placeholder 3"/>
           <p:cNvSpPr>
             <a:spLocks noGrp="1"/>
           </p:cNvSpPr>
@@ -2318,7 +2318,7 @@
       </p:sp>
       <p:sp>
         <p:nvSpPr>
-          <p:cNvPr id="558499414" name="Footer Placeholder 4"/>
+          <p:cNvPr id="653803478" name="Footer Placeholder 4"/>
           <p:cNvSpPr>
             <a:spLocks noGrp="1"/>
           </p:cNvSpPr>
@@ -2341,7 +2341,7 @@
       </p:sp>
       <p:sp>
         <p:nvSpPr>
-          <p:cNvPr id="171718659" name="Slide Number Placeholder 5"/>
+          <p:cNvPr id="1326235137" name="Slide Number Placeholder 5"/>
           <p:cNvSpPr>
             <a:spLocks noGrp="1"/>
           </p:cNvSpPr>
@@ -2368,7 +2368,7 @@
       </p:sp>
       <p:sp>
         <p:nvSpPr>
-          <p:cNvPr id="1514849946" name="Rectangle 640957806"/>
+          <p:cNvPr id="1493397509" name="Rectangle 640957806"/>
           <p:cNvSpPr>
             <a:spLocks noGrp="1"/>
           </p:cNvSpPr>
@@ -2447,7 +2447,7 @@
       </p:grpSpPr>
       <p:sp>
         <p:nvSpPr>
-          <p:cNvPr id="834207516" name="Title 1"/>
+          <p:cNvPr id="1240046832" name="Title 1"/>
           <p:cNvSpPr>
             <a:spLocks noGrp="1"/>
           </p:cNvSpPr>
@@ -2484,7 +2484,7 @@
       </p:sp>
       <p:sp>
         <p:nvSpPr>
-          <p:cNvPr id="494272674" name="Content Placeholder 2"/>
+          <p:cNvPr id="1368957150" name="Content Placeholder 2"/>
           <p:cNvSpPr>
             <a:spLocks noGrp="1"/>
           </p:cNvSpPr>
@@ -2597,7 +2597,7 @@
       </p:sp>
       <p:sp>
         <p:nvSpPr>
-          <p:cNvPr id="1402257160" name="Text Placeholder 3"/>
+          <p:cNvPr id="6350649" name="Text Placeholder 3"/>
           <p:cNvSpPr>
             <a:spLocks noGrp="1"/>
           </p:cNvSpPr>
@@ -2666,7 +2666,7 @@
       </p:sp>
       <p:sp>
         <p:nvSpPr>
-          <p:cNvPr id="359730368" name="Date Placeholder 4"/>
+          <p:cNvPr id="53870089" name="Date Placeholder 4"/>
           <p:cNvSpPr>
             <a:spLocks noGrp="1"/>
           </p:cNvSpPr>
@@ -2693,7 +2693,7 @@
       </p:sp>
       <p:sp>
         <p:nvSpPr>
-          <p:cNvPr id="1968105915" name="Footer Placeholder 5"/>
+          <p:cNvPr id="153150758" name="Footer Placeholder 5"/>
           <p:cNvSpPr>
             <a:spLocks noGrp="1"/>
           </p:cNvSpPr>
@@ -2716,7 +2716,7 @@
       </p:sp>
       <p:sp>
         <p:nvSpPr>
-          <p:cNvPr id="1376003516" name="Slide Number Placeholder 6"/>
+          <p:cNvPr id="173865206" name="Slide Number Placeholder 6"/>
           <p:cNvSpPr>
             <a:spLocks noGrp="1"/>
           </p:cNvSpPr>
@@ -2768,7 +2768,7 @@
       </p:grpSpPr>
       <p:sp>
         <p:nvSpPr>
-          <p:cNvPr id="1337683901" name="Title 1"/>
+          <p:cNvPr id="1470566149" name="Title 1"/>
           <p:cNvSpPr>
             <a:spLocks noGrp="1"/>
           </p:cNvSpPr>
@@ -2795,7 +2795,7 @@
       </p:sp>
       <p:sp>
         <p:nvSpPr>
-          <p:cNvPr id="1045110999" name="Vertical Text Placeholder 2"/>
+          <p:cNvPr id="1383035637" name="Vertical Text Placeholder 2"/>
           <p:cNvSpPr>
             <a:spLocks noGrp="1"/>
           </p:cNvSpPr>
@@ -2866,7 +2866,7 @@
       </p:sp>
       <p:sp>
         <p:nvSpPr>
-          <p:cNvPr id="745786060" name="Date Placeholder 3"/>
+          <p:cNvPr id="2036570159" name="Date Placeholder 3"/>
           <p:cNvSpPr>
             <a:spLocks noGrp="1"/>
           </p:cNvSpPr>
@@ -2893,7 +2893,7 @@
       </p:sp>
       <p:sp>
         <p:nvSpPr>
-          <p:cNvPr id="2053783912" name="Footer Placeholder 4"/>
+          <p:cNvPr id="1985583171" name="Footer Placeholder 4"/>
           <p:cNvSpPr>
             <a:spLocks noGrp="1"/>
           </p:cNvSpPr>
@@ -2916,7 +2916,7 @@
       </p:sp>
       <p:sp>
         <p:nvSpPr>
-          <p:cNvPr id="1029660015" name="Slide Number Placeholder 5"/>
+          <p:cNvPr id="939901061" name="Slide Number Placeholder 5"/>
           <p:cNvSpPr>
             <a:spLocks noGrp="1"/>
           </p:cNvSpPr>
@@ -2968,7 +2968,7 @@
       </p:grpSpPr>
       <p:sp>
         <p:nvSpPr>
-          <p:cNvPr id="1779781027" name="Vertical Title 1"/>
+          <p:cNvPr id="777016208" name="Vertical Title 1"/>
           <p:cNvSpPr>
             <a:spLocks noGrp="1"/>
           </p:cNvSpPr>
@@ -3000,7 +3000,7 @@
       </p:sp>
       <p:sp>
         <p:nvSpPr>
-          <p:cNvPr id="597623722" name="Vertical Text Placeholder 2"/>
+          <p:cNvPr id="464802516" name="Vertical Text Placeholder 2"/>
           <p:cNvSpPr>
             <a:spLocks noGrp="1"/>
           </p:cNvSpPr>
@@ -3076,7 +3076,7 @@
       </p:sp>
       <p:sp>
         <p:nvSpPr>
-          <p:cNvPr id="333371197" name="Date Placeholder 3"/>
+          <p:cNvPr id="1606321413" name="Date Placeholder 3"/>
           <p:cNvSpPr>
             <a:spLocks noGrp="1"/>
           </p:cNvSpPr>
@@ -3103,7 +3103,7 @@
       </p:sp>
       <p:sp>
         <p:nvSpPr>
-          <p:cNvPr id="172444569" name="Footer Placeholder 4"/>
+          <p:cNvPr id="1264945922" name="Footer Placeholder 4"/>
           <p:cNvSpPr>
             <a:spLocks noGrp="1"/>
           </p:cNvSpPr>
@@ -3126,7 +3126,7 @@
       </p:sp>
       <p:sp>
         <p:nvSpPr>
-          <p:cNvPr id="1191082587" name="Slide Number Placeholder 5"/>
+          <p:cNvPr id="1612659433" name="Slide Number Placeholder 5"/>
           <p:cNvSpPr>
             <a:spLocks noGrp="1"/>
           </p:cNvSpPr>
@@ -3178,7 +3178,7 @@
       </p:grpSpPr>
       <p:sp>
         <p:nvSpPr>
-          <p:cNvPr id="1167559920" name="Title 1"/>
+          <p:cNvPr id="618129945" name="Title 1"/>
           <p:cNvSpPr>
             <a:spLocks noGrp="1"/>
           </p:cNvSpPr>
@@ -3249,7 +3249,7 @@
       </p:sp>
       <p:sp>
         <p:nvSpPr>
-          <p:cNvPr id="647224538" name="Content Placeholder 2"/>
+          <p:cNvPr id="1233969528" name="Content Placeholder 2"/>
           <p:cNvSpPr>
             <a:spLocks noGrp="1"/>
           </p:cNvSpPr>
@@ -3366,7 +3366,7 @@
       </p:sp>
       <p:sp>
         <p:nvSpPr>
-          <p:cNvPr id="2075749639" name="Date Placeholder 3"/>
+          <p:cNvPr id="2003079793" name="Date Placeholder 3"/>
           <p:cNvSpPr>
             <a:spLocks noGrp="1"/>
           </p:cNvSpPr>
@@ -3393,7 +3393,7 @@
       </p:sp>
       <p:sp>
         <p:nvSpPr>
-          <p:cNvPr id="255504947" name="Footer Placeholder 4"/>
+          <p:cNvPr id="598458612" name="Footer Placeholder 4"/>
           <p:cNvSpPr>
             <a:spLocks noGrp="1"/>
           </p:cNvSpPr>
@@ -3416,7 +3416,7 @@
       </p:sp>
       <p:sp>
         <p:nvSpPr>
-          <p:cNvPr id="135186112" name="Slide Number Placeholder 5"/>
+          <p:cNvPr id="968247649" name="Slide Number Placeholder 5"/>
           <p:cNvSpPr>
             <a:spLocks noGrp="1"/>
           </p:cNvSpPr>
@@ -3443,7 +3443,7 @@
       </p:sp>
       <p:sp>
         <p:nvSpPr>
-          <p:cNvPr id="179938760" name="Rectangle 640957806"/>
+          <p:cNvPr id="1361434912" name="Rectangle 640957806"/>
           <p:cNvSpPr>
             <a:spLocks noGrp="1"/>
           </p:cNvSpPr>
@@ -3511,7 +3511,7 @@
       </p:grpSpPr>
       <p:sp>
         <p:nvSpPr>
-          <p:cNvPr id="2109740858" name="Title 1"/>
+          <p:cNvPr id="243084257" name="Title 1"/>
           <p:cNvSpPr>
             <a:spLocks noGrp="1"/>
           </p:cNvSpPr>
@@ -3582,7 +3582,7 @@
       </p:sp>
       <p:sp>
         <p:nvSpPr>
-          <p:cNvPr id="2127894213" name="Content Placeholder 2"/>
+          <p:cNvPr id="1719836330" name="Content Placeholder 2"/>
           <p:cNvSpPr>
             <a:spLocks noGrp="1"/>
           </p:cNvSpPr>
@@ -3706,7 +3706,7 @@
       </p:sp>
       <p:sp>
         <p:nvSpPr>
-          <p:cNvPr id="1691212810" name="Date Placeholder 3"/>
+          <p:cNvPr id="67985903" name="Date Placeholder 3"/>
           <p:cNvSpPr>
             <a:spLocks noGrp="1"/>
           </p:cNvSpPr>
@@ -3733,7 +3733,7 @@
       </p:sp>
       <p:sp>
         <p:nvSpPr>
-          <p:cNvPr id="993122367" name="Footer Placeholder 4"/>
+          <p:cNvPr id="303430372" name="Footer Placeholder 4"/>
           <p:cNvSpPr>
             <a:spLocks noGrp="1"/>
           </p:cNvSpPr>
@@ -3756,7 +3756,7 @@
       </p:sp>
       <p:sp>
         <p:nvSpPr>
-          <p:cNvPr id="501814287" name="Slide Number Placeholder 5"/>
+          <p:cNvPr id="2008277444" name="Slide Number Placeholder 5"/>
           <p:cNvSpPr>
             <a:spLocks noGrp="1"/>
           </p:cNvSpPr>
@@ -3783,7 +3783,7 @@
       </p:sp>
       <p:sp>
         <p:nvSpPr>
-          <p:cNvPr id="1190777519" name="Rectangle 640957806"/>
+          <p:cNvPr id="1010927167" name="Rectangle 640957806"/>
           <p:cNvSpPr>
             <a:spLocks noGrp="1"/>
           </p:cNvSpPr>
@@ -3851,7 +3851,7 @@
       </p:grpSpPr>
       <p:pic>
         <p:nvPicPr>
-          <p:cNvPr id="503485854" name="Picture 1835292972"/>
+          <p:cNvPr id="594756756" name="Picture 1835292972"/>
           <p:cNvPicPr>
             <a:picLocks noChangeAspect="1"/>
           </p:cNvPicPr>
@@ -3875,7 +3875,7 @@
       </p:pic>
       <p:sp>
         <p:nvSpPr>
-          <p:cNvPr id="587255989" name="Title 1"/>
+          <p:cNvPr id="1145576836" name="Title 1"/>
           <p:cNvSpPr>
             <a:spLocks noGrp="1"/>
           </p:cNvSpPr>
@@ -3950,7 +3950,7 @@
       </p:sp>
       <p:sp>
         <p:nvSpPr>
-          <p:cNvPr id="235944252" name="Text Placeholder 2"/>
+          <p:cNvPr id="1502565047" name="Text Placeholder 2"/>
           <p:cNvSpPr>
             <a:spLocks noGrp="1"/>
           </p:cNvSpPr>
@@ -4071,7 +4071,7 @@
       </p:sp>
       <p:sp>
         <p:nvSpPr>
-          <p:cNvPr id="1303864985" name="Date Placeholder 3"/>
+          <p:cNvPr id="2007926706" name="Date Placeholder 3"/>
           <p:cNvSpPr>
             <a:spLocks noGrp="1"/>
           </p:cNvSpPr>
@@ -4098,7 +4098,7 @@
       </p:sp>
       <p:sp>
         <p:nvSpPr>
-          <p:cNvPr id="1798592985" name="Footer Placeholder 4"/>
+          <p:cNvPr id="529172727" name="Footer Placeholder 4"/>
           <p:cNvSpPr>
             <a:spLocks noGrp="1"/>
           </p:cNvSpPr>
@@ -4121,7 +4121,7 @@
       </p:sp>
       <p:sp>
         <p:nvSpPr>
-          <p:cNvPr id="1532106009" name="Slide Number Placeholder 5"/>
+          <p:cNvPr id="409624977" name="Slide Number Placeholder 5"/>
           <p:cNvSpPr>
             <a:spLocks noGrp="1"/>
           </p:cNvSpPr>
@@ -4148,7 +4148,7 @@
       </p:sp>
       <p:sp>
         <p:nvSpPr>
-          <p:cNvPr id="1273407277" name="Rectangle 640957806"/>
+          <p:cNvPr id="1303322395" name="Rectangle 640957806"/>
           <p:cNvSpPr>
             <a:spLocks noGrp="1"/>
           </p:cNvSpPr>
@@ -4216,7 +4216,7 @@
       </p:grpSpPr>
       <p:sp>
         <p:nvSpPr>
-          <p:cNvPr id="278310622" name="Title 1"/>
+          <p:cNvPr id="1288659364" name="Title 1"/>
           <p:cNvSpPr>
             <a:spLocks noGrp="1"/>
           </p:cNvSpPr>
@@ -4280,7 +4280,7 @@
       </p:sp>
       <p:sp>
         <p:nvSpPr>
-          <p:cNvPr id="1408028960" name="Content Placeholder 2"/>
+          <p:cNvPr id="690434345" name="Content Placeholder 2"/>
           <p:cNvSpPr>
             <a:spLocks noGrp="1"/>
           </p:cNvSpPr>
@@ -4402,7 +4402,7 @@
       </p:sp>
       <p:sp>
         <p:nvSpPr>
-          <p:cNvPr id="1471502868" name="Content Placeholder 3"/>
+          <p:cNvPr id="1100499279" name="Content Placeholder 3"/>
           <p:cNvSpPr>
             <a:spLocks noGrp="1"/>
           </p:cNvSpPr>
@@ -4524,7 +4524,7 @@
       </p:sp>
       <p:sp>
         <p:nvSpPr>
-          <p:cNvPr id="1187280958" name="Date Placeholder 4"/>
+          <p:cNvPr id="749732631" name="Date Placeholder 4"/>
           <p:cNvSpPr>
             <a:spLocks noGrp="1"/>
           </p:cNvSpPr>
@@ -4551,7 +4551,7 @@
       </p:sp>
       <p:sp>
         <p:nvSpPr>
-          <p:cNvPr id="560372488" name="Footer Placeholder 5"/>
+          <p:cNvPr id="738941746" name="Footer Placeholder 5"/>
           <p:cNvSpPr>
             <a:spLocks noGrp="1"/>
           </p:cNvSpPr>
@@ -4574,7 +4574,7 @@
       </p:sp>
       <p:sp>
         <p:nvSpPr>
-          <p:cNvPr id="1996101314" name="Slide Number Placeholder 6"/>
+          <p:cNvPr id="638683091" name="Slide Number Placeholder 6"/>
           <p:cNvSpPr>
             <a:spLocks noGrp="1"/>
           </p:cNvSpPr>
@@ -4601,7 +4601,7 @@
       </p:sp>
       <p:sp>
         <p:nvSpPr>
-          <p:cNvPr id="544529712" name="Rectangle 640957806"/>
+          <p:cNvPr id="1407268048" name="Rectangle 640957806"/>
           <p:cNvSpPr>
             <a:spLocks noGrp="1"/>
           </p:cNvSpPr>
@@ -4669,7 +4669,7 @@
       </p:grpSpPr>
       <p:sp>
         <p:nvSpPr>
-          <p:cNvPr id="1146147817" name="Title 1"/>
+          <p:cNvPr id="474261470" name="Title 1"/>
           <p:cNvSpPr>
             <a:spLocks noGrp="1"/>
           </p:cNvSpPr>
@@ -4738,7 +4738,7 @@
       </p:sp>
       <p:sp>
         <p:nvSpPr>
-          <p:cNvPr id="1880704562" name="Text Placeholder 2"/>
+          <p:cNvPr id="1117574852" name="Text Placeholder 2"/>
           <p:cNvSpPr>
             <a:spLocks noGrp="1"/>
           </p:cNvSpPr>
@@ -4809,7 +4809,7 @@
       </p:sp>
       <p:sp>
         <p:nvSpPr>
-          <p:cNvPr id="1687574482" name="Content Placeholder 3"/>
+          <p:cNvPr id="1051286199" name="Content Placeholder 3"/>
           <p:cNvSpPr>
             <a:spLocks noGrp="1"/>
           </p:cNvSpPr>
@@ -4931,7 +4931,7 @@
       </p:sp>
       <p:sp>
         <p:nvSpPr>
-          <p:cNvPr id="1058107974" name="Text Placeholder 4"/>
+          <p:cNvPr id="805326043" name="Text Placeholder 4"/>
           <p:cNvSpPr>
             <a:spLocks noGrp="1"/>
           </p:cNvSpPr>
@@ -5002,7 +5002,7 @@
       </p:sp>
       <p:sp>
         <p:nvSpPr>
-          <p:cNvPr id="2074606587" name="Content Placeholder 5"/>
+          <p:cNvPr id="1735788158" name="Content Placeholder 5"/>
           <p:cNvSpPr>
             <a:spLocks noGrp="1"/>
           </p:cNvSpPr>
@@ -5124,7 +5124,7 @@
       </p:sp>
       <p:sp>
         <p:nvSpPr>
-          <p:cNvPr id="958170275" name="Date Placeholder 6"/>
+          <p:cNvPr id="1046934223" name="Date Placeholder 6"/>
           <p:cNvSpPr>
             <a:spLocks noGrp="1"/>
           </p:cNvSpPr>
@@ -5151,7 +5151,7 @@
       </p:sp>
       <p:sp>
         <p:nvSpPr>
-          <p:cNvPr id="281260431" name="Footer Placeholder 7"/>
+          <p:cNvPr id="1620767895" name="Footer Placeholder 7"/>
           <p:cNvSpPr>
             <a:spLocks noGrp="1"/>
           </p:cNvSpPr>
@@ -5174,7 +5174,7 @@
       </p:sp>
       <p:sp>
         <p:nvSpPr>
-          <p:cNvPr id="449114717" name="Slide Number Placeholder 8"/>
+          <p:cNvPr id="36773982" name="Slide Number Placeholder 8"/>
           <p:cNvSpPr>
             <a:spLocks noGrp="1"/>
           </p:cNvSpPr>
@@ -5201,7 +5201,7 @@
       </p:sp>
       <p:sp>
         <p:nvSpPr>
-          <p:cNvPr id="198245200" name="Rectangle 640957806"/>
+          <p:cNvPr id="1647186700" name="Rectangle 640957806"/>
           <p:cNvSpPr>
             <a:spLocks noGrp="1"/>
           </p:cNvSpPr>
@@ -5269,7 +5269,7 @@
       </p:grpSpPr>
       <p:sp>
         <p:nvSpPr>
-          <p:cNvPr id="1228455281" name="Title 1"/>
+          <p:cNvPr id="1139608712" name="Title 1"/>
           <p:cNvSpPr>
             <a:spLocks noGrp="1"/>
           </p:cNvSpPr>
@@ -5312,7 +5312,7 @@
       </p:sp>
       <p:sp>
         <p:nvSpPr>
-          <p:cNvPr id="1265614322" name="Picture Placeholder 2"/>
+          <p:cNvPr id="546535620" name="Picture Placeholder 2"/>
           <p:cNvSpPr>
             <a:spLocks noGrp="1"/>
           </p:cNvSpPr>
@@ -5381,7 +5381,7 @@
       </p:sp>
       <p:sp>
         <p:nvSpPr>
-          <p:cNvPr id="2043651506" name="Text Placeholder 3"/>
+          <p:cNvPr id="758397902" name="Text Placeholder 3"/>
           <p:cNvSpPr>
             <a:spLocks noGrp="1"/>
           </p:cNvSpPr>
@@ -5454,7 +5454,7 @@
       </p:sp>
       <p:sp>
         <p:nvSpPr>
-          <p:cNvPr id="426461849" name="Date Placeholder 4"/>
+          <p:cNvPr id="658256980" name="Date Placeholder 4"/>
           <p:cNvSpPr>
             <a:spLocks noGrp="1"/>
           </p:cNvSpPr>
@@ -5481,7 +5481,7 @@
       </p:sp>
       <p:sp>
         <p:nvSpPr>
-          <p:cNvPr id="636973708" name="Footer Placeholder 5"/>
+          <p:cNvPr id="1182299199" name="Footer Placeholder 5"/>
           <p:cNvSpPr>
             <a:spLocks noGrp="1"/>
           </p:cNvSpPr>
@@ -5504,7 +5504,7 @@
       </p:sp>
       <p:sp>
         <p:nvSpPr>
-          <p:cNvPr id="605607816" name="Slide Number Placeholder 6"/>
+          <p:cNvPr id="1018364703" name="Slide Number Placeholder 6"/>
           <p:cNvSpPr>
             <a:spLocks noGrp="1"/>
           </p:cNvSpPr>
@@ -5531,7 +5531,7 @@
       </p:sp>
       <p:sp>
         <p:nvSpPr>
-          <p:cNvPr id="234417677" name="Rectangle 640957806"/>
+          <p:cNvPr id="132548738" name="Rectangle 640957806"/>
           <p:cNvSpPr>
             <a:spLocks noGrp="1"/>
           </p:cNvSpPr>
@@ -5599,7 +5599,7 @@
       </p:grpSpPr>
       <p:pic>
         <p:nvPicPr>
-          <p:cNvPr id="1715690910" name="Picture 752255626"/>
+          <p:cNvPr id="890340388" name="Picture 752255626"/>
           <p:cNvPicPr>
             <a:picLocks noChangeAspect="1"/>
           </p:cNvPicPr>
@@ -5623,7 +5623,7 @@
       </p:pic>
       <p:sp>
         <p:nvSpPr>
-          <p:cNvPr id="147754309" name="Title 1"/>
+          <p:cNvPr id="2136944161" name="Title 1"/>
           <p:cNvSpPr>
             <a:spLocks noGrp="1"/>
           </p:cNvSpPr>
@@ -5728,7 +5728,7 @@
       </p:sp>
       <p:sp>
         <p:nvSpPr>
-          <p:cNvPr id="1848444080" name="Date Placeholder 2"/>
+          <p:cNvPr id="2029406895" name="Date Placeholder 2"/>
           <p:cNvSpPr>
             <a:spLocks noGrp="1"/>
           </p:cNvSpPr>
@@ -5755,7 +5755,7 @@
       </p:sp>
       <p:sp>
         <p:nvSpPr>
-          <p:cNvPr id="267969759" name="Footer Placeholder 3"/>
+          <p:cNvPr id="2097889191" name="Footer Placeholder 3"/>
           <p:cNvSpPr>
             <a:spLocks noGrp="1"/>
           </p:cNvSpPr>
@@ -5778,7 +5778,7 @@
       </p:sp>
       <p:sp>
         <p:nvSpPr>
-          <p:cNvPr id="291619636" name="Slide Number Placeholder 4"/>
+          <p:cNvPr id="670491531" name="Slide Number Placeholder 4"/>
           <p:cNvSpPr>
             <a:spLocks noGrp="1"/>
           </p:cNvSpPr>
@@ -5830,7 +5830,7 @@
       </p:grpSpPr>
       <p:sp>
         <p:nvSpPr>
-          <p:cNvPr id="915150970" name="Date Placeholder 1"/>
+          <p:cNvPr id="869473594" name="Date Placeholder 1"/>
           <p:cNvSpPr>
             <a:spLocks noGrp="1"/>
           </p:cNvSpPr>
@@ -5857,7 +5857,7 @@
       </p:sp>
       <p:sp>
         <p:nvSpPr>
-          <p:cNvPr id="1078737159" name="Footer Placeholder 2"/>
+          <p:cNvPr id="2086791145" name="Footer Placeholder 2"/>
           <p:cNvSpPr>
             <a:spLocks noGrp="1"/>
           </p:cNvSpPr>
@@ -5880,7 +5880,7 @@
       </p:sp>
       <p:sp>
         <p:nvSpPr>
-          <p:cNvPr id="1359245556" name="Slide Number Placeholder 3"/>
+          <p:cNvPr id="1946364101" name="Slide Number Placeholder 3"/>
           <p:cNvSpPr>
             <a:spLocks noGrp="1"/>
           </p:cNvSpPr>
@@ -5937,7 +5937,7 @@
       </p:grpSpPr>
       <p:sp>
         <p:nvSpPr>
-          <p:cNvPr id="1975074337" name="Title Placeholder 1"/>
+          <p:cNvPr id="1311534846" name="Title Placeholder 1"/>
           <p:cNvSpPr>
             <a:spLocks noGrp="1"/>
           </p:cNvSpPr>
@@ -5979,7 +5979,7 @@
       </p:sp>
       <p:sp>
         <p:nvSpPr>
-          <p:cNvPr id="2047495683" name="Text Placeholder 2"/>
+          <p:cNvPr id="603908400" name="Text Placeholder 2"/>
           <p:cNvSpPr>
             <a:spLocks noGrp="1"/>
           </p:cNvSpPr>
@@ -6097,7 +6097,7 @@
       </p:sp>
       <p:sp>
         <p:nvSpPr>
-          <p:cNvPr id="965871932" name="Date Placeholder 3"/>
+          <p:cNvPr id="1664238722" name="Date Placeholder 3"/>
           <p:cNvSpPr>
             <a:spLocks noGrp="1"/>
           </p:cNvSpPr>
@@ -6143,7 +6143,7 @@
       </p:sp>
       <p:sp>
         <p:nvSpPr>
-          <p:cNvPr id="220605616" name="Footer Placeholder 4"/>
+          <p:cNvPr id="1065670953" name="Footer Placeholder 4"/>
           <p:cNvSpPr>
             <a:spLocks noGrp="1"/>
           </p:cNvSpPr>
@@ -6185,7 +6185,7 @@
       </p:sp>
       <p:sp>
         <p:nvSpPr>
-          <p:cNvPr id="540950797" name="Slide Number Placeholder 5"/>
+          <p:cNvPr id="691906376" name="Slide Number Placeholder 5"/>
           <p:cNvSpPr>
             <a:spLocks noGrp="1"/>
           </p:cNvSpPr>
@@ -6554,7 +6554,7 @@
       </p:grpSpPr>
       <p:sp>
         <p:nvSpPr>
-          <p:cNvPr id="2078032819" name="section-title"/>
+          <p:cNvPr id="1807604222" name="section-title"/>
           <p:cNvSpPr>
             <a:spLocks noGrp="1"/>
           </p:cNvSpPr>
@@ -6639,7 +6639,7 @@
       </p:grpSpPr>
       <p:sp>
         <p:nvSpPr>
-          <p:cNvPr id="909685135" name="Rectangle 7713821"/>
+          <p:cNvPr id="332087160" name="Rectangle 7713821"/>
           <p:cNvSpPr>
             <a:spLocks noGrp="1"/>
           </p:cNvSpPr>
@@ -6685,7 +6685,7 @@
       </p:sp>
       <p:sp>
         <p:nvSpPr>
-          <p:cNvPr id="964791723" name="Rectangle 1381388514"/>
+          <p:cNvPr id="21352320" name="Rectangle 1381388514"/>
           <p:cNvSpPr>
             <a:spLocks noGrp="1"/>
           </p:cNvSpPr>
@@ -6731,7 +6731,7 @@
       </p:sp>
       <p:sp>
         <p:nvSpPr>
-          <p:cNvPr id="838889034" name="Rectangle 181180573"/>
+          <p:cNvPr id="1709138691" name="Rectangle 181180573"/>
           <p:cNvSpPr>
             <a:spLocks noGrp="1"/>
           </p:cNvSpPr>
@@ -6783,7 +6783,7 @@
       </p:sp>
       <p:sp>
         <p:nvSpPr>
-          <p:cNvPr id="174859524" name="case-2-canvas"/>
+          <p:cNvPr id="2127394761" name="case-2-canvas"/>
           <p:cNvSpPr>
             <a:spLocks noGrp="1"/>
           </p:cNvSpPr>
@@ -6818,7 +6818,7 @@
       </p:sp>
       <p:sp>
         <p:nvSpPr>
-          <p:cNvPr id="603158094" name="case-2-rule"/>
+          <p:cNvPr id="1475089369" name="case-2-rule"/>
           <p:cNvSpPr>
             <a:spLocks noGrp="1"/>
           </p:cNvSpPr>
@@ -6845,7 +6845,7 @@
       </p:sp>
       <p:sp>
         <p:nvSpPr>
-          <p:cNvPr id="914892604" name=""/>
+          <p:cNvPr id="968801360" name=""/>
           <p:cNvSpPr>
             <a:spLocks noGrp="1"/>
           </p:cNvSpPr>
@@ -6891,7 +6891,7 @@
       </p:sp>
       <p:sp>
         <p:nvSpPr>
-          <p:cNvPr id="1891415940" name=""/>
+          <p:cNvPr id="1642024207" name=""/>
           <p:cNvSpPr>
             <a:spLocks noGrp="1"/>
           </p:cNvSpPr>
@@ -6937,7 +6937,7 @@
       </p:sp>
       <p:sp>
         <p:nvSpPr>
-          <p:cNvPr id="2124580580" name=""/>
+          <p:cNvPr id="1588436408" name=""/>
           <p:cNvSpPr>
             <a:spLocks noGrp="1"/>
           </p:cNvSpPr>
@@ -6983,7 +6983,7 @@
       </p:sp>
       <p:sp>
         <p:nvSpPr>
-          <p:cNvPr id="1236517754" name=""/>
+          <p:cNvPr id="1611683229" name=""/>
           <p:cNvSpPr>
             <a:spLocks noGrp="1"/>
           </p:cNvSpPr>
@@ -7029,7 +7029,7 @@
       </p:sp>
       <p:sp>
         <p:nvSpPr>
-          <p:cNvPr id="1635232981" name=""/>
+          <p:cNvPr id="145885125" name=""/>
           <p:cNvSpPr>
             <a:spLocks noGrp="1"/>
           </p:cNvSpPr>
@@ -7075,7 +7075,7 @@
       </p:sp>
       <p:sp>
         <p:nvSpPr>
-          <p:cNvPr id="1864016244" name=""/>
+          <p:cNvPr id="681069029" name=""/>
           <p:cNvSpPr>
             <a:spLocks noGrp="1"/>
           </p:cNvSpPr>
@@ -7121,7 +7121,7 @@
       </p:sp>
       <p:sp>
         <p:nvSpPr>
-          <p:cNvPr id="1844561949" name=""/>
+          <p:cNvPr id="66851553" name=""/>
           <p:cNvSpPr>
             <a:spLocks noGrp="1"/>
           </p:cNvSpPr>
@@ -7186,7 +7186,7 @@
       </p:sp>
       <p:sp>
         <p:nvSpPr>
-          <p:cNvPr id="1132211415" name=""/>
+          <p:cNvPr id="1277339272" name=""/>
           <p:cNvSpPr>
             <a:spLocks noGrp="1"/>
           </p:cNvSpPr>
@@ -7232,7 +7232,7 @@
       </p:sp>
       <p:sp>
         <p:nvSpPr>
-          <p:cNvPr id="379935777" name="case-2-source-link"/>
+          <p:cNvPr id="184166409" name="case-2-source-link"/>
           <p:cNvSpPr>
             <a:spLocks noGrp="1"/>
           </p:cNvSpPr>
@@ -7261,7 +7261,7 @@
       </p:sp>
       <p:sp>
         <p:nvSpPr>
-          <p:cNvPr id="257819109" name=""/>
+          <p:cNvPr id="2103325608" name=""/>
           <p:cNvSpPr>
             <a:spLocks noGrp="1"/>
           </p:cNvSpPr>
@@ -7341,7 +7341,7 @@
       </p:grpSpPr>
       <p:sp>
         <p:nvSpPr>
-          <p:cNvPr id="1337764706" name="Rectangle 7713821"/>
+          <p:cNvPr id="1794329784" name="Rectangle 7713821"/>
           <p:cNvSpPr>
             <a:spLocks noGrp="1"/>
           </p:cNvSpPr>
@@ -7387,7 +7387,7 @@
       </p:sp>
       <p:sp>
         <p:nvSpPr>
-          <p:cNvPr id="1348760738" name="Rectangle 1381388514"/>
+          <p:cNvPr id="415550671" name="Rectangle 1381388514"/>
           <p:cNvSpPr>
             <a:spLocks noGrp="1"/>
           </p:cNvSpPr>
@@ -7433,7 +7433,7 @@
       </p:sp>
       <p:sp>
         <p:nvSpPr>
-          <p:cNvPr id="896662342" name="Rectangle 181180573"/>
+          <p:cNvPr id="911493348" name="Rectangle 181180573"/>
           <p:cNvSpPr>
             <a:spLocks noGrp="1"/>
           </p:cNvSpPr>
@@ -7485,7 +7485,7 @@
       </p:sp>
       <p:sp>
         <p:nvSpPr>
-          <p:cNvPr id="731354611" name="case-3-canvas"/>
+          <p:cNvPr id="2024909880" name="case-3-canvas"/>
           <p:cNvSpPr>
             <a:spLocks noGrp="1"/>
           </p:cNvSpPr>
@@ -7520,7 +7520,7 @@
       </p:sp>
       <p:sp>
         <p:nvSpPr>
-          <p:cNvPr id="1423781993" name="case-3-rule"/>
+          <p:cNvPr id="216998889" name="case-3-rule"/>
           <p:cNvSpPr>
             <a:spLocks noGrp="1"/>
           </p:cNvSpPr>
@@ -7547,7 +7547,7 @@
       </p:sp>
       <p:sp>
         <p:nvSpPr>
-          <p:cNvPr id="1290791765" name=""/>
+          <p:cNvPr id="1787970385" name=""/>
           <p:cNvSpPr>
             <a:spLocks noGrp="1"/>
           </p:cNvSpPr>
@@ -7593,7 +7593,7 @@
       </p:sp>
       <p:sp>
         <p:nvSpPr>
-          <p:cNvPr id="340925923" name=""/>
+          <p:cNvPr id="711242174" name=""/>
           <p:cNvSpPr>
             <a:spLocks noGrp="1"/>
           </p:cNvSpPr>
@@ -7639,7 +7639,7 @@
       </p:sp>
       <p:sp>
         <p:nvSpPr>
-          <p:cNvPr id="771487118" name=""/>
+          <p:cNvPr id="8435848" name=""/>
           <p:cNvSpPr>
             <a:spLocks noGrp="1"/>
           </p:cNvSpPr>
@@ -7685,7 +7685,7 @@
       </p:sp>
       <p:sp>
         <p:nvSpPr>
-          <p:cNvPr id="142195516" name=""/>
+          <p:cNvPr id="1990390582" name=""/>
           <p:cNvSpPr>
             <a:spLocks noGrp="1"/>
           </p:cNvSpPr>
@@ -7731,7 +7731,7 @@
       </p:sp>
       <p:sp>
         <p:nvSpPr>
-          <p:cNvPr id="77621066" name=""/>
+          <p:cNvPr id="1127622483" name=""/>
           <p:cNvSpPr>
             <a:spLocks noGrp="1"/>
           </p:cNvSpPr>
@@ -7777,7 +7777,7 @@
       </p:sp>
       <p:sp>
         <p:nvSpPr>
-          <p:cNvPr id="2048358939" name=""/>
+          <p:cNvPr id="799151781" name=""/>
           <p:cNvSpPr>
             <a:spLocks noGrp="1"/>
           </p:cNvSpPr>
@@ -7823,7 +7823,7 @@
       </p:sp>
       <p:sp>
         <p:nvSpPr>
-          <p:cNvPr id="1520471301" name=""/>
+          <p:cNvPr id="382072642" name=""/>
           <p:cNvSpPr>
             <a:spLocks noGrp="1"/>
           </p:cNvSpPr>
@@ -7888,7 +7888,7 @@
       </p:sp>
       <p:sp>
         <p:nvSpPr>
-          <p:cNvPr id="1780570642" name=""/>
+          <p:cNvPr id="192359901" name=""/>
           <p:cNvSpPr>
             <a:spLocks noGrp="1"/>
           </p:cNvSpPr>
@@ -7934,7 +7934,7 @@
       </p:sp>
       <p:sp>
         <p:nvSpPr>
-          <p:cNvPr id="1835414517" name="case-3-source-link"/>
+          <p:cNvPr id="1346718017" name="case-3-source-link"/>
           <p:cNvSpPr>
             <a:spLocks noGrp="1"/>
           </p:cNvSpPr>
@@ -7963,7 +7963,7 @@
       </p:sp>
       <p:sp>
         <p:nvSpPr>
-          <p:cNvPr id="243301811" name=""/>
+          <p:cNvPr id="1386029327" name=""/>
           <p:cNvSpPr>
             <a:spLocks noGrp="1"/>
           </p:cNvSpPr>
@@ -8043,7 +8043,7 @@
       </p:grpSpPr>
       <p:sp>
         <p:nvSpPr>
-          <p:cNvPr id="177744176" name="Rectangle 7713821"/>
+          <p:cNvPr id="1993370715" name="Rectangle 7713821"/>
           <p:cNvSpPr>
             <a:spLocks noGrp="1"/>
           </p:cNvSpPr>
@@ -8089,7 +8089,7 @@
       </p:sp>
       <p:sp>
         <p:nvSpPr>
-          <p:cNvPr id="1163833446" name="Rectangle 1381388514"/>
+          <p:cNvPr id="324873369" name="Rectangle 1381388514"/>
           <p:cNvSpPr>
             <a:spLocks noGrp="1"/>
           </p:cNvSpPr>
@@ -8135,7 +8135,7 @@
       </p:sp>
       <p:sp>
         <p:nvSpPr>
-          <p:cNvPr id="656213720" name="Rectangle 181180573"/>
+          <p:cNvPr id="1672384719" name="Rectangle 181180573"/>
           <p:cNvSpPr>
             <a:spLocks noGrp="1"/>
           </p:cNvSpPr>
@@ -8187,7 +8187,7 @@
       </p:sp>
       <p:sp>
         <p:nvSpPr>
-          <p:cNvPr id="380860394" name="case-4-canvas"/>
+          <p:cNvPr id="1323672380" name="case-4-canvas"/>
           <p:cNvSpPr>
             <a:spLocks noGrp="1"/>
           </p:cNvSpPr>
@@ -8222,7 +8222,7 @@
       </p:sp>
       <p:sp>
         <p:nvSpPr>
-          <p:cNvPr id="470163252" name="case-4-rule"/>
+          <p:cNvPr id="1848845364" name="case-4-rule"/>
           <p:cNvSpPr>
             <a:spLocks noGrp="1"/>
           </p:cNvSpPr>
@@ -8249,7 +8249,7 @@
       </p:sp>
       <p:sp>
         <p:nvSpPr>
-          <p:cNvPr id="1832014657" name=""/>
+          <p:cNvPr id="15629423" name=""/>
           <p:cNvSpPr>
             <a:spLocks noGrp="1"/>
           </p:cNvSpPr>
@@ -8295,7 +8295,7 @@
       </p:sp>
       <p:sp>
         <p:nvSpPr>
-          <p:cNvPr id="359540641" name=""/>
+          <p:cNvPr id="1009067011" name=""/>
           <p:cNvSpPr>
             <a:spLocks noGrp="1"/>
           </p:cNvSpPr>
@@ -8341,7 +8341,7 @@
       </p:sp>
       <p:sp>
         <p:nvSpPr>
-          <p:cNvPr id="1251524318" name=""/>
+          <p:cNvPr id="1497227706" name=""/>
           <p:cNvSpPr>
             <a:spLocks noGrp="1"/>
           </p:cNvSpPr>
@@ -8387,7 +8387,7 @@
       </p:sp>
       <p:sp>
         <p:nvSpPr>
-          <p:cNvPr id="750698752" name=""/>
+          <p:cNvPr id="1100832991" name=""/>
           <p:cNvSpPr>
             <a:spLocks noGrp="1"/>
           </p:cNvSpPr>
@@ -8433,7 +8433,7 @@
       </p:sp>
       <p:sp>
         <p:nvSpPr>
-          <p:cNvPr id="2134302855" name=""/>
+          <p:cNvPr id="1525627544" name=""/>
           <p:cNvSpPr>
             <a:spLocks noGrp="1"/>
           </p:cNvSpPr>
@@ -8479,7 +8479,7 @@
       </p:sp>
       <p:sp>
         <p:nvSpPr>
-          <p:cNvPr id="1871584208" name=""/>
+          <p:cNvPr id="2091411930" name=""/>
           <p:cNvSpPr>
             <a:spLocks noGrp="1"/>
           </p:cNvSpPr>
@@ -8525,7 +8525,7 @@
       </p:sp>
       <p:sp>
         <p:nvSpPr>
-          <p:cNvPr id="328684154" name=""/>
+          <p:cNvPr id="1142098079" name=""/>
           <p:cNvSpPr>
             <a:spLocks noGrp="1"/>
           </p:cNvSpPr>
@@ -8590,7 +8590,7 @@
       </p:sp>
       <p:sp>
         <p:nvSpPr>
-          <p:cNvPr id="1249289456" name=""/>
+          <p:cNvPr id="1438323333" name=""/>
           <p:cNvSpPr>
             <a:spLocks noGrp="1"/>
           </p:cNvSpPr>
@@ -8636,7 +8636,7 @@
       </p:sp>
       <p:sp>
         <p:nvSpPr>
-          <p:cNvPr id="307577329" name="case-4-source-link"/>
+          <p:cNvPr id="357671080" name="case-4-source-link"/>
           <p:cNvSpPr>
             <a:spLocks noGrp="1"/>
           </p:cNvSpPr>
@@ -8665,7 +8665,7 @@
       </p:sp>
       <p:sp>
         <p:nvSpPr>
-          <p:cNvPr id="1130215774" name=""/>
+          <p:cNvPr id="150000" name=""/>
           <p:cNvSpPr>
             <a:spLocks noGrp="1"/>
           </p:cNvSpPr>
@@ -8745,7 +8745,7 @@
       </p:grpSpPr>
       <p:sp>
         <p:nvSpPr>
-          <p:cNvPr id="1610667051" name="Rectangle 7713821"/>
+          <p:cNvPr id="263303118" name="Rectangle 7713821"/>
           <p:cNvSpPr>
             <a:spLocks noGrp="1"/>
           </p:cNvSpPr>
@@ -8791,7 +8791,7 @@
       </p:sp>
       <p:sp>
         <p:nvSpPr>
-          <p:cNvPr id="288163914" name="Rectangle 1381388514"/>
+          <p:cNvPr id="291525104" name="Rectangle 1381388514"/>
           <p:cNvSpPr>
             <a:spLocks noGrp="1"/>
           </p:cNvSpPr>
@@ -8837,7 +8837,7 @@
       </p:sp>
       <p:sp>
         <p:nvSpPr>
-          <p:cNvPr id="404166661" name="Rectangle 181180573"/>
+          <p:cNvPr id="62883426" name="Rectangle 181180573"/>
           <p:cNvSpPr>
             <a:spLocks noGrp="1"/>
           </p:cNvSpPr>
@@ -8889,7 +8889,7 @@
       </p:sp>
       <p:sp>
         <p:nvSpPr>
-          <p:cNvPr id="1157422948" name="case-5-canvas"/>
+          <p:cNvPr id="1030790414" name="case-5-canvas"/>
           <p:cNvSpPr>
             <a:spLocks noGrp="1"/>
           </p:cNvSpPr>
@@ -8924,7 +8924,7 @@
       </p:sp>
       <p:sp>
         <p:nvSpPr>
-          <p:cNvPr id="1784264433" name="case-5-rule"/>
+          <p:cNvPr id="2067748755" name="case-5-rule"/>
           <p:cNvSpPr>
             <a:spLocks noGrp="1"/>
           </p:cNvSpPr>
@@ -8951,7 +8951,7 @@
       </p:sp>
       <p:sp>
         <p:nvSpPr>
-          <p:cNvPr id="1382455760" name=""/>
+          <p:cNvPr id="438954348" name=""/>
           <p:cNvSpPr>
             <a:spLocks noGrp="1"/>
           </p:cNvSpPr>
@@ -8997,7 +8997,7 @@
       </p:sp>
       <p:sp>
         <p:nvSpPr>
-          <p:cNvPr id="888919278" name=""/>
+          <p:cNvPr id="756202135" name=""/>
           <p:cNvSpPr>
             <a:spLocks noGrp="1"/>
           </p:cNvSpPr>
@@ -9043,7 +9043,7 @@
       </p:sp>
       <p:sp>
         <p:nvSpPr>
-          <p:cNvPr id="1723792995" name=""/>
+          <p:cNvPr id="1579811890" name=""/>
           <p:cNvSpPr>
             <a:spLocks noGrp="1"/>
           </p:cNvSpPr>
@@ -9089,7 +9089,7 @@
       </p:sp>
       <p:sp>
         <p:nvSpPr>
-          <p:cNvPr id="759736478" name=""/>
+          <p:cNvPr id="740954180" name=""/>
           <p:cNvSpPr>
             <a:spLocks noGrp="1"/>
           </p:cNvSpPr>
@@ -9135,7 +9135,7 @@
       </p:sp>
       <p:sp>
         <p:nvSpPr>
-          <p:cNvPr id="330362348" name=""/>
+          <p:cNvPr id="1011449924" name=""/>
           <p:cNvSpPr>
             <a:spLocks noGrp="1"/>
           </p:cNvSpPr>
@@ -9181,7 +9181,7 @@
       </p:sp>
       <p:sp>
         <p:nvSpPr>
-          <p:cNvPr id="373997081" name=""/>
+          <p:cNvPr id="567319767" name=""/>
           <p:cNvSpPr>
             <a:spLocks noGrp="1"/>
           </p:cNvSpPr>
@@ -9227,7 +9227,7 @@
       </p:sp>
       <p:sp>
         <p:nvSpPr>
-          <p:cNvPr id="179217013" name=""/>
+          <p:cNvPr id="1237390363" name=""/>
           <p:cNvSpPr>
             <a:spLocks noGrp="1"/>
           </p:cNvSpPr>
@@ -9292,7 +9292,7 @@
       </p:sp>
       <p:sp>
         <p:nvSpPr>
-          <p:cNvPr id="1167824211" name=""/>
+          <p:cNvPr id="3515365" name=""/>
           <p:cNvSpPr>
             <a:spLocks noGrp="1"/>
           </p:cNvSpPr>
@@ -9338,7 +9338,7 @@
       </p:sp>
       <p:sp>
         <p:nvSpPr>
-          <p:cNvPr id="2062153399" name="case-5-source-link"/>
+          <p:cNvPr id="152181418" name="case-5-source-link"/>
           <p:cNvSpPr>
             <a:spLocks noGrp="1"/>
           </p:cNvSpPr>
@@ -9367,7 +9367,7 @@
       </p:sp>
       <p:sp>
         <p:nvSpPr>
-          <p:cNvPr id="1916273290" name=""/>
+          <p:cNvPr id="464132116" name=""/>
           <p:cNvSpPr>
             <a:spLocks noGrp="1"/>
           </p:cNvSpPr>
@@ -9447,7 +9447,7 @@
       </p:grpSpPr>
       <p:sp>
         <p:nvSpPr>
-          <p:cNvPr id="531356646" name="Rectangle 7713821"/>
+          <p:cNvPr id="1220649948" name="Rectangle 7713821"/>
           <p:cNvSpPr>
             <a:spLocks noGrp="1"/>
           </p:cNvSpPr>
@@ -9493,7 +9493,7 @@
       </p:sp>
       <p:sp>
         <p:nvSpPr>
-          <p:cNvPr id="1293779506" name="Rectangle 1381388514"/>
+          <p:cNvPr id="1646259806" name="Rectangle 1381388514"/>
           <p:cNvSpPr>
             <a:spLocks noGrp="1"/>
           </p:cNvSpPr>
@@ -9539,7 +9539,7 @@
       </p:sp>
       <p:sp>
         <p:nvSpPr>
-          <p:cNvPr id="470706952" name="Rectangle 181180573"/>
+          <p:cNvPr id="1850707233" name="Rectangle 181180573"/>
           <p:cNvSpPr>
             <a:spLocks noGrp="1"/>
           </p:cNvSpPr>
@@ -9591,7 +9591,7 @@
       </p:sp>
       <p:sp>
         <p:nvSpPr>
-          <p:cNvPr id="157009982" name="security-canvas"/>
+          <p:cNvPr id="2009938890" name="security-canvas"/>
           <p:cNvSpPr>
             <a:spLocks noGrp="1"/>
           </p:cNvSpPr>
@@ -9626,7 +9626,7 @@
       </p:sp>
       <p:sp>
         <p:nvSpPr>
-          <p:cNvPr id="1255263660" name="conditions-to-llm-arrow"/>
+          <p:cNvPr id="227913751" name="conditions-to-llm-arrow"/>
           <p:cNvSpPr>
             <a:spLocks noGrp="1"/>
           </p:cNvSpPr>
@@ -9656,7 +9656,7 @@
       </p:sp>
       <p:sp>
         <p:nvSpPr>
-          <p:cNvPr id="1508032925" name="llm-to-verification-arrow"/>
+          <p:cNvPr id="331283016" name="llm-to-verification-arrow"/>
           <p:cNvSpPr>
             <a:spLocks noGrp="1"/>
           </p:cNvSpPr>
@@ -9686,7 +9686,7 @@
       </p:sp>
       <p:sp>
         <p:nvSpPr>
-          <p:cNvPr id="348467352" name="verification-to-action-arrow"/>
+          <p:cNvPr id="919376137" name="verification-to-action-arrow"/>
           <p:cNvSpPr>
             <a:spLocks noGrp="1"/>
           </p:cNvSpPr>
@@ -9716,7 +9716,7 @@
       </p:sp>
       <p:sp>
         <p:nvSpPr>
-          <p:cNvPr id="1883627814" name="cause-1"/>
+          <p:cNvPr id="1895914388" name="cause-1"/>
           <p:cNvSpPr>
             <a:spLocks noGrp="1"/>
           </p:cNvSpPr>
@@ -9767,7 +9767,7 @@
       </p:sp>
       <p:sp>
         <p:nvSpPr>
-          <p:cNvPr id="1590236115" name=""/>
+          <p:cNvPr id="1872122506" name=""/>
           <p:cNvSpPr>
             <a:spLocks noGrp="1"/>
           </p:cNvSpPr>
@@ -9812,7 +9812,7 @@
       </p:sp>
       <p:sp>
         <p:nvSpPr>
-          <p:cNvPr id="829405440" name="cause-2"/>
+          <p:cNvPr id="1242638511" name="cause-2"/>
           <p:cNvSpPr>
             <a:spLocks noGrp="1"/>
           </p:cNvSpPr>
@@ -9863,7 +9863,7 @@
       </p:sp>
       <p:sp>
         <p:nvSpPr>
-          <p:cNvPr id="1959787988" name=""/>
+          <p:cNvPr id="767485354" name=""/>
           <p:cNvSpPr>
             <a:spLocks noGrp="1"/>
           </p:cNvSpPr>
@@ -9908,7 +9908,7 @@
       </p:sp>
       <p:sp>
         <p:nvSpPr>
-          <p:cNvPr id="1497311956" name="cause-3"/>
+          <p:cNvPr id="1444447637" name="cause-3"/>
           <p:cNvSpPr>
             <a:spLocks noGrp="1"/>
           </p:cNvSpPr>
@@ -9959,7 +9959,7 @@
       </p:sp>
       <p:sp>
         <p:nvSpPr>
-          <p:cNvPr id="1094267424" name=""/>
+          <p:cNvPr id="1683142921" name=""/>
           <p:cNvSpPr>
             <a:spLocks noGrp="1"/>
           </p:cNvSpPr>
@@ -10004,7 +10004,7 @@
       </p:sp>
       <p:sp>
         <p:nvSpPr>
-          <p:cNvPr id="345531098" name="cause-4"/>
+          <p:cNvPr id="1589965880" name="cause-4"/>
           <p:cNvSpPr>
             <a:spLocks noGrp="1"/>
           </p:cNvSpPr>
@@ -10055,7 +10055,7 @@
       </p:sp>
       <p:sp>
         <p:nvSpPr>
-          <p:cNvPr id="1119328058" name=""/>
+          <p:cNvPr id="1463705472" name=""/>
           <p:cNvSpPr>
             <a:spLocks noGrp="1"/>
           </p:cNvSpPr>
@@ -10100,7 +10100,7 @@
       </p:sp>
       <p:sp>
         <p:nvSpPr>
-          <p:cNvPr id="935468604" name="cause-llm"/>
+          <p:cNvPr id="259286793" name="cause-llm"/>
           <p:cNvSpPr>
             <a:spLocks noGrp="1"/>
           </p:cNvSpPr>
@@ -10151,7 +10151,7 @@
       </p:sp>
       <p:sp>
         <p:nvSpPr>
-          <p:cNvPr id="1229096483" name="cause-no-verification"/>
+          <p:cNvPr id="1758549000" name="cause-no-verification"/>
           <p:cNvSpPr>
             <a:spLocks noGrp="1"/>
           </p:cNvSpPr>
@@ -10202,7 +10202,7 @@
       </p:sp>
       <p:sp>
         <p:nvSpPr>
-          <p:cNvPr id="1082223974" name="cause-risky-action"/>
+          <p:cNvPr id="59924218" name="cause-risky-action"/>
           <p:cNvSpPr>
             <a:spLocks noGrp="1"/>
           </p:cNvSpPr>
@@ -10253,7 +10253,7 @@
       </p:sp>
       <p:sp>
         <p:nvSpPr>
-          <p:cNvPr id="295116843" name=""/>
+          <p:cNvPr id="1386839505" name=""/>
           <p:cNvSpPr>
             <a:spLocks noGrp="1"/>
           </p:cNvSpPr>
@@ -10331,7 +10331,7 @@
       </p:grpSpPr>
       <p:sp>
         <p:nvSpPr>
-          <p:cNvPr id="1159426776" name="Rectangle 7713821"/>
+          <p:cNvPr id="2144165544" name="Rectangle 7713821"/>
           <p:cNvSpPr>
             <a:spLocks noGrp="1"/>
           </p:cNvSpPr>
@@ -10377,7 +10377,7 @@
       </p:sp>
       <p:sp>
         <p:nvSpPr>
-          <p:cNvPr id="1967669773" name="Rectangle 1381388514"/>
+          <p:cNvPr id="1877164358" name="Rectangle 1381388514"/>
           <p:cNvSpPr>
             <a:spLocks noGrp="1"/>
           </p:cNvSpPr>
@@ -10423,7 +10423,7 @@
       </p:sp>
       <p:sp>
         <p:nvSpPr>
-          <p:cNvPr id="915757134" name="Rectangle 181180573"/>
+          <p:cNvPr id="1773298361" name="Rectangle 181180573"/>
           <p:cNvSpPr>
             <a:spLocks noGrp="1"/>
           </p:cNvSpPr>
@@ -10475,7 +10475,7 @@
       </p:sp>
       <p:sp>
         <p:nvSpPr>
-          <p:cNvPr id="510491637" name="security-canvas"/>
+          <p:cNvPr id="1234774522" name="security-canvas"/>
           <p:cNvSpPr>
             <a:spLocks noGrp="1"/>
           </p:cNvSpPr>
@@ -10510,7 +10510,7 @@
       </p:sp>
       <p:sp>
         <p:nvSpPr>
-          <p:cNvPr id="77450774" name="defense-flow-1"/>
+          <p:cNvPr id="88268494" name="defense-flow-1"/>
           <p:cNvSpPr>
             <a:spLocks noGrp="1"/>
           </p:cNvSpPr>
@@ -10540,7 +10540,7 @@
       </p:sp>
       <p:sp>
         <p:nvSpPr>
-          <p:cNvPr id="1859436519" name="defense-flow-2"/>
+          <p:cNvPr id="234649851" name="defense-flow-2"/>
           <p:cNvSpPr>
             <a:spLocks noGrp="1"/>
           </p:cNvSpPr>
@@ -10570,7 +10570,7 @@
       </p:sp>
       <p:sp>
         <p:nvSpPr>
-          <p:cNvPr id="1956330405" name="defense-flow-3"/>
+          <p:cNvPr id="1958676959" name="defense-flow-3"/>
           <p:cNvSpPr>
             <a:spLocks noGrp="1"/>
           </p:cNvSpPr>
@@ -10600,7 +10600,7 @@
       </p:sp>
       <p:sp>
         <p:nvSpPr>
-          <p:cNvPr id="1619587222" name="defense-flow-4"/>
+          <p:cNvPr id="1866871612" name="defense-flow-4"/>
           <p:cNvSpPr>
             <a:spLocks noGrp="1"/>
           </p:cNvSpPr>
@@ -10630,7 +10630,7 @@
       </p:sp>
       <p:sp>
         <p:nvSpPr>
-          <p:cNvPr id="1473883253" name="defense-flow-5"/>
+          <p:cNvPr id="952594490" name="defense-flow-5"/>
           <p:cNvSpPr>
             <a:spLocks noGrp="1"/>
           </p:cNvSpPr>
@@ -10660,7 +10660,7 @@
       </p:sp>
       <p:sp>
         <p:nvSpPr>
-          <p:cNvPr id="1864003171" name="kill-switch-stop-arrow"/>
+          <p:cNvPr id="1062024053" name="kill-switch-stop-arrow"/>
           <p:cNvSpPr>
             <a:spLocks noGrp="1"/>
           </p:cNvSpPr>
@@ -10690,7 +10690,7 @@
       </p:sp>
       <p:sp>
         <p:nvSpPr>
-          <p:cNvPr id="607705733" name="defense-input"/>
+          <p:cNvPr id="1748200609" name="defense-input"/>
           <p:cNvSpPr>
             <a:spLocks noGrp="1"/>
           </p:cNvSpPr>
@@ -10741,7 +10741,7 @@
       </p:sp>
       <p:sp>
         <p:nvSpPr>
-          <p:cNvPr id="1205137017" name="defense-input-filtering"/>
+          <p:cNvPr id="1084773636" name="defense-input-filtering"/>
           <p:cNvSpPr>
             <a:spLocks noGrp="1"/>
           </p:cNvSpPr>
@@ -10810,7 +10810,7 @@
       </p:sp>
       <p:sp>
         <p:nvSpPr>
-          <p:cNvPr id="1725691357" name="defense-llm"/>
+          <p:cNvPr id="1971873250" name="defense-llm"/>
           <p:cNvSpPr>
             <a:spLocks noGrp="1"/>
           </p:cNvSpPr>
@@ -10861,7 +10861,7 @@
       </p:sp>
       <p:sp>
         <p:nvSpPr>
-          <p:cNvPr id="541040783" name="defense-permission-boundary"/>
+          <p:cNvPr id="938363683" name="defense-permission-boundary"/>
           <p:cNvSpPr>
             <a:spLocks noGrp="1"/>
           </p:cNvSpPr>
@@ -10930,7 +10930,7 @@
       </p:sp>
       <p:sp>
         <p:nvSpPr>
-          <p:cNvPr id="2077256307" name="defense-human-approval"/>
+          <p:cNvPr id="2108883981" name="defense-human-approval"/>
           <p:cNvSpPr>
             <a:spLocks noGrp="1"/>
           </p:cNvSpPr>
@@ -10999,7 +10999,7 @@
       </p:sp>
       <p:sp>
         <p:nvSpPr>
-          <p:cNvPr id="488498085" name="defense-action"/>
+          <p:cNvPr id="1715582525" name="defense-action"/>
           <p:cNvSpPr>
             <a:spLocks noGrp="1"/>
           </p:cNvSpPr>
@@ -11050,7 +11050,7 @@
       </p:sp>
       <p:sp>
         <p:nvSpPr>
-          <p:cNvPr id="1098452487" name="defense-monitoring"/>
+          <p:cNvPr id="1467760676" name="defense-monitoring"/>
           <p:cNvSpPr>
             <a:spLocks noGrp="1"/>
           </p:cNvSpPr>
@@ -11079,7 +11079,7 @@
       </p:sp>
       <p:sp>
         <p:nvSpPr>
-          <p:cNvPr id="788481466" name=""/>
+          <p:cNvPr id="629483846" name=""/>
           <p:cNvSpPr>
             <a:spLocks noGrp="1"/>
           </p:cNvSpPr>
@@ -11124,7 +11124,7 @@
       </p:sp>
       <p:sp>
         <p:nvSpPr>
-          <p:cNvPr id="1341076761" name="defense-kill-switch"/>
+          <p:cNvPr id="971108711" name="defense-kill-switch"/>
           <p:cNvSpPr>
             <a:spLocks noGrp="1"/>
           </p:cNvSpPr>
@@ -11193,7 +11193,7 @@
       </p:sp>
       <p:sp>
         <p:nvSpPr>
-          <p:cNvPr id="1721462242" name=""/>
+          <p:cNvPr id="281659378" name=""/>
           <p:cNvSpPr>
             <a:spLocks noGrp="1"/>
           </p:cNvSpPr>
@@ -11238,7 +11238,7 @@
       </p:sp>
       <p:sp>
         <p:nvSpPr>
-          <p:cNvPr id="1514168244" name=""/>
+          <p:cNvPr id="1800266453" name=""/>
           <p:cNvSpPr>
             <a:spLocks noGrp="1"/>
           </p:cNvSpPr>
@@ -11283,7 +11283,7 @@
       </p:sp>
       <p:sp>
         <p:nvSpPr>
-          <p:cNvPr id="1548654039" name=""/>
+          <p:cNvPr id="551777455" name=""/>
           <p:cNvSpPr>
             <a:spLocks noGrp="1"/>
           </p:cNvSpPr>
@@ -11361,7 +11361,7 @@
       </p:grpSpPr>
       <p:sp>
         <p:nvSpPr>
-          <p:cNvPr id="1337940634" name="Rectangle 7713821"/>
+          <p:cNvPr id="1135679169" name="Rectangle 7713821"/>
           <p:cNvSpPr>
             <a:spLocks noGrp="1"/>
           </p:cNvSpPr>
@@ -11407,7 +11407,7 @@
       </p:sp>
       <p:sp>
         <p:nvSpPr>
-          <p:cNvPr id="1233637069" name="Rectangle 1381388514"/>
+          <p:cNvPr id="982612604" name="Rectangle 1381388514"/>
           <p:cNvSpPr>
             <a:spLocks noGrp="1"/>
           </p:cNvSpPr>
@@ -11453,7 +11453,7 @@
       </p:sp>
       <p:sp>
         <p:nvSpPr>
-          <p:cNvPr id="489011531" name="Rectangle 181180573"/>
+          <p:cNvPr id="720674852" name="Rectangle 181180573"/>
           <p:cNvSpPr>
             <a:spLocks noGrp="1"/>
           </p:cNvSpPr>
@@ -11505,7 +11505,7 @@
       </p:sp>
       <p:sp>
         <p:nvSpPr>
-          <p:cNvPr id="428573467" name="security-canvas"/>
+          <p:cNvPr id="611953872" name="security-canvas"/>
           <p:cNvSpPr>
             <a:spLocks noGrp="1"/>
           </p:cNvSpPr>
@@ -11540,7 +11540,7 @@
       </p:sp>
       <p:sp>
         <p:nvSpPr>
-          <p:cNvPr id="2070686605" name=""/>
+          <p:cNvPr id="1734957164" name=""/>
           <p:cNvSpPr>
             <a:spLocks noGrp="1"/>
           </p:cNvSpPr>
@@ -11605,7 +11605,7 @@
       </p:sp>
       <p:sp>
         <p:nvSpPr>
-          <p:cNvPr id="740025192" name="final-divider"/>
+          <p:cNvPr id="559872308" name="final-divider"/>
           <p:cNvSpPr>
             <a:spLocks noGrp="1"/>
           </p:cNvSpPr>
@@ -11630,7 +11630,7 @@
       </p:sp>
       <p:sp>
         <p:nvSpPr>
-          <p:cNvPr id="43109408" name=""/>
+          <p:cNvPr id="645245998" name=""/>
           <p:cNvSpPr>
             <a:spLocks noGrp="1"/>
           </p:cNvSpPr>
@@ -11676,7 +11676,7 @@
       </p:sp>
       <p:sp>
         <p:nvSpPr>
-          <p:cNvPr id="1609464670" name="direct-action-arrow"/>
+          <p:cNvPr id="181292299" name="direct-action-arrow"/>
           <p:cNvSpPr>
             <a:spLocks noGrp="1"/>
           </p:cNvSpPr>
@@ -11706,7 +11706,7 @@
       </p:sp>
       <p:sp>
         <p:nvSpPr>
-          <p:cNvPr id="1953624776" name="node-llm"/>
+          <p:cNvPr id="812294082" name="node-llm"/>
           <p:cNvSpPr>
             <a:spLocks noGrp="1"/>
           </p:cNvSpPr>
@@ -11758,7 +11758,7 @@
       </p:sp>
       <p:sp>
         <p:nvSpPr>
-          <p:cNvPr id="583796475" name="node-direct-action"/>
+          <p:cNvPr id="109437427" name="node-direct-action"/>
           <p:cNvSpPr>
             <a:spLocks noGrp="1"/>
           </p:cNvSpPr>
@@ -11829,7 +11829,7 @@
       </p:sp>
       <p:sp>
         <p:nvSpPr>
-          <p:cNvPr id="521759595" name=""/>
+          <p:cNvPr id="465050376" name=""/>
           <p:cNvSpPr>
             <a:spLocks noGrp="1"/>
           </p:cNvSpPr>
@@ -11875,7 +11875,7 @@
       </p:sp>
       <p:sp>
         <p:nvSpPr>
-          <p:cNvPr id="626510744" name="control-arrow-1"/>
+          <p:cNvPr id="811514753" name="control-arrow-1"/>
           <p:cNvSpPr>
             <a:spLocks noGrp="1"/>
           </p:cNvSpPr>
@@ -11905,7 +11905,7 @@
       </p:sp>
       <p:sp>
         <p:nvSpPr>
-          <p:cNvPr id="495246883" name="control-arrow-2"/>
+          <p:cNvPr id="1351854592" name="control-arrow-2"/>
           <p:cNvSpPr>
             <a:spLocks noGrp="1"/>
           </p:cNvSpPr>
@@ -11935,7 +11935,7 @@
       </p:sp>
       <p:sp>
         <p:nvSpPr>
-          <p:cNvPr id="246662862" name="control-arrow-3"/>
+          <p:cNvPr id="1168048676" name="control-arrow-3"/>
           <p:cNvSpPr>
             <a:spLocks noGrp="1"/>
           </p:cNvSpPr>
@@ -11965,7 +11965,7 @@
       </p:sp>
       <p:sp>
         <p:nvSpPr>
-          <p:cNvPr id="186723835" name="node-llm"/>
+          <p:cNvPr id="1389805473" name="node-llm"/>
           <p:cNvSpPr>
             <a:spLocks noGrp="1"/>
           </p:cNvSpPr>
@@ -12017,7 +12017,7 @@
       </p:sp>
       <p:sp>
         <p:nvSpPr>
-          <p:cNvPr id="1369389285" name="node-permission"/>
+          <p:cNvPr id="285390948" name="node-permission"/>
           <p:cNvSpPr>
             <a:spLocks noGrp="1"/>
           </p:cNvSpPr>
@@ -12069,7 +12069,7 @@
       </p:sp>
       <p:sp>
         <p:nvSpPr>
-          <p:cNvPr id="397842379" name="node-validation"/>
+          <p:cNvPr id="882374951" name="node-validation"/>
           <p:cNvSpPr>
             <a:spLocks noGrp="1"/>
           </p:cNvSpPr>
@@ -12121,7 +12121,7 @@
       </p:sp>
       <p:sp>
         <p:nvSpPr>
-          <p:cNvPr id="2039347923" name="node-action"/>
+          <p:cNvPr id="661233057" name="node-action"/>
           <p:cNvSpPr>
             <a:spLocks noGrp="1"/>
           </p:cNvSpPr>
@@ -12173,7 +12173,7 @@
       </p:sp>
       <p:sp>
         <p:nvSpPr>
-          <p:cNvPr id="1187816427" name=""/>
+          <p:cNvPr id="39202957" name=""/>
           <p:cNvSpPr>
             <a:spLocks noGrp="1"/>
           </p:cNvSpPr>
@@ -12252,7 +12252,7 @@
       </p:grpSpPr>
       <p:sp>
         <p:nvSpPr>
-          <p:cNvPr id="1319130211" name="Rectangle 197505908"/>
+          <p:cNvPr id="1240600601" name="Rectangle 197505908"/>
           <p:cNvSpPr>
             <a:spLocks noGrp="1"/>
           </p:cNvSpPr>
@@ -12304,7 +12304,7 @@
       </p:sp>
       <p:sp>
         <p:nvSpPr>
-          <p:cNvPr id="830112187" name="Rectangle 1909048147"/>
+          <p:cNvPr id="309147083" name="Rectangle 1909048147"/>
           <p:cNvSpPr>
             <a:spLocks noGrp="1"/>
           </p:cNvSpPr>
@@ -12356,7 +12356,7 @@
       </p:sp>
       <p:sp>
         <p:nvSpPr>
-          <p:cNvPr id="563437795" name="Rectangle: Rounded Corners 816331080"/>
+          <p:cNvPr id="2014575129" name="Rectangle: Rounded Corners 816331080"/>
           <p:cNvSpPr>
             <a:spLocks noGrp="1"/>
           </p:cNvSpPr>
@@ -12396,7 +12396,7 @@
       </p:sp>
       <p:sp>
         <p:nvSpPr>
-          <p:cNvPr id="1869637542" name="Rectangle 191215672"/>
+          <p:cNvPr id="213970" name="Rectangle 191215672"/>
           <p:cNvSpPr>
             <a:spLocks noGrp="1"/>
           </p:cNvSpPr>
@@ -12448,7 +12448,7 @@
       </p:sp>
       <p:sp>
         <p:nvSpPr>
-          <p:cNvPr id="1409099003" name="data-leakage-arrow-1"/>
+          <p:cNvPr id="1223120700" name="data-leakage-arrow-1"/>
           <p:cNvSpPr>
             <a:spLocks noGrp="1"/>
           </p:cNvSpPr>
@@ -12478,7 +12478,7 @@
       </p:sp>
       <p:sp>
         <p:nvSpPr>
-          <p:cNvPr id="1571005726" name="data-leakage-arrow-2"/>
+          <p:cNvPr id="1198916204" name="data-leakage-arrow-2"/>
           <p:cNvSpPr>
             <a:spLocks noGrp="1"/>
           </p:cNvSpPr>
@@ -12508,7 +12508,7 @@
       </p:sp>
       <p:sp>
         <p:nvSpPr>
-          <p:cNvPr id="312771519" name="data-leakage-1-enters"/>
+          <p:cNvPr id="40999741" name="data-leakage-1-enters"/>
           <p:cNvSpPr>
             <a:spLocks noGrp="1"/>
           </p:cNvSpPr>
@@ -12543,7 +12543,7 @@
       </p:sp>
       <p:sp>
         <p:nvSpPr>
-          <p:cNvPr id="1074169162" name=""/>
+          <p:cNvPr id="652075957" name=""/>
           <p:cNvSpPr>
             <a:spLocks noGrp="1"/>
           </p:cNvSpPr>
@@ -12588,7 +12588,7 @@
       </p:sp>
       <p:sp>
         <p:nvSpPr>
-          <p:cNvPr id="355570667" name=""/>
+          <p:cNvPr id="1525591841" name=""/>
           <p:cNvSpPr>
             <a:spLocks noGrp="1"/>
           </p:cNvSpPr>
@@ -12633,7 +12633,7 @@
       </p:sp>
       <p:sp>
         <p:nvSpPr>
-          <p:cNvPr id="1718147951" name=""/>
+          <p:cNvPr id="1558683176" name=""/>
           <p:cNvSpPr>
             <a:spLocks noGrp="1"/>
           </p:cNvSpPr>
@@ -12714,7 +12714,7 @@
       </p:sp>
       <p:sp>
         <p:nvSpPr>
-          <p:cNvPr id="524900599" name="data-leakage-2-becomes-context"/>
+          <p:cNvPr id="1801647791" name="data-leakage-2-becomes-context"/>
           <p:cNvSpPr>
             <a:spLocks noGrp="1"/>
           </p:cNvSpPr>
@@ -12749,7 +12749,7 @@
       </p:sp>
       <p:sp>
         <p:nvSpPr>
-          <p:cNvPr id="776535850" name=""/>
+          <p:cNvPr id="11786091" name=""/>
           <p:cNvSpPr>
             <a:spLocks noGrp="1"/>
           </p:cNvSpPr>
@@ -12794,7 +12794,7 @@
       </p:sp>
       <p:sp>
         <p:nvSpPr>
-          <p:cNvPr id="817815735" name=""/>
+          <p:cNvPr id="1251918582" name=""/>
           <p:cNvSpPr>
             <a:spLocks noGrp="1"/>
           </p:cNvSpPr>
@@ -12839,7 +12839,7 @@
       </p:sp>
       <p:sp>
         <p:nvSpPr>
-          <p:cNvPr id="802878795" name=""/>
+          <p:cNvPr id="1094636596" name=""/>
           <p:cNvSpPr>
             <a:spLocks noGrp="1"/>
           </p:cNvSpPr>
@@ -12920,7 +12920,7 @@
       </p:sp>
       <p:sp>
         <p:nvSpPr>
-          <p:cNvPr id="1431979924" name="data-leakage-3-leaves"/>
+          <p:cNvPr id="719993503" name="data-leakage-3-leaves"/>
           <p:cNvSpPr>
             <a:spLocks noGrp="1"/>
           </p:cNvSpPr>
@@ -12955,7 +12955,7 @@
       </p:sp>
       <p:sp>
         <p:nvSpPr>
-          <p:cNvPr id="50857757" name=""/>
+          <p:cNvPr id="2116892769" name=""/>
           <p:cNvSpPr>
             <a:spLocks noGrp="1"/>
           </p:cNvSpPr>
@@ -13000,7 +13000,7 @@
       </p:sp>
       <p:sp>
         <p:nvSpPr>
-          <p:cNvPr id="598957020" name=""/>
+          <p:cNvPr id="1613139696" name=""/>
           <p:cNvSpPr>
             <a:spLocks noGrp="1"/>
           </p:cNvSpPr>
@@ -13045,7 +13045,7 @@
       </p:sp>
       <p:sp>
         <p:nvSpPr>
-          <p:cNvPr id="1963014488" name=""/>
+          <p:cNvPr id="609871332" name=""/>
           <p:cNvSpPr>
             <a:spLocks noGrp="1"/>
           </p:cNvSpPr>
@@ -13126,7 +13126,7 @@
       </p:sp>
       <p:sp>
         <p:nvSpPr>
-          <p:cNvPr id="1456266373" name=""/>
+          <p:cNvPr id="2007752871" name=""/>
           <p:cNvSpPr>
             <a:spLocks noGrp="1"/>
           </p:cNvSpPr>
@@ -13204,7 +13204,7 @@
       </p:grpSpPr>
       <p:sp>
         <p:nvSpPr>
-          <p:cNvPr id="912887905" name="Rectangle 7713821"/>
+          <p:cNvPr id="777380131" name="Rectangle 7713821"/>
           <p:cNvSpPr>
             <a:spLocks noGrp="1"/>
           </p:cNvSpPr>
@@ -13250,7 +13250,7 @@
       </p:sp>
       <p:sp>
         <p:nvSpPr>
-          <p:cNvPr id="536706301" name="Rectangle 1381388514"/>
+          <p:cNvPr id="477436786" name="Rectangle 1381388514"/>
           <p:cNvSpPr>
             <a:spLocks noGrp="1"/>
           </p:cNvSpPr>
@@ -13296,7 +13296,7 @@
       </p:sp>
       <p:sp>
         <p:nvSpPr>
-          <p:cNvPr id="760324379" name="Rectangle 181180573"/>
+          <p:cNvPr id="390519744" name="Rectangle 181180573"/>
           <p:cNvSpPr>
             <a:spLocks noGrp="1"/>
           </p:cNvSpPr>
@@ -13348,7 +13348,7 @@
       </p:sp>
       <p:sp>
         <p:nvSpPr>
-          <p:cNvPr id="196379351" name="security-canvas"/>
+          <p:cNvPr id="353345016" name="security-canvas"/>
           <p:cNvSpPr>
             <a:spLocks noGrp="1"/>
           </p:cNvSpPr>
@@ -13383,7 +13383,7 @@
       </p:sp>
       <p:sp>
         <p:nvSpPr>
-          <p:cNvPr id="1828142759" name="flow-arrow-1"/>
+          <p:cNvPr id="1109858461" name="flow-arrow-1"/>
           <p:cNvSpPr>
             <a:spLocks noGrp="1"/>
           </p:cNvSpPr>
@@ -13413,7 +13413,7 @@
       </p:sp>
       <p:sp>
         <p:nvSpPr>
-          <p:cNvPr id="1651119402" name="flow-arrow-2"/>
+          <p:cNvPr id="971949868" name="flow-arrow-2"/>
           <p:cNvSpPr>
             <a:spLocks noGrp="1"/>
           </p:cNvSpPr>
@@ -13443,7 +13443,7 @@
       </p:sp>
       <p:sp>
         <p:nvSpPr>
-          <p:cNvPr id="1655301428" name="flow-arrow-3"/>
+          <p:cNvPr id="566105773" name="flow-arrow-3"/>
           <p:cNvSpPr>
             <a:spLocks noGrp="1"/>
           </p:cNvSpPr>
@@ -13473,7 +13473,7 @@
       </p:sp>
       <p:sp>
         <p:nvSpPr>
-          <p:cNvPr id="1244869600" name="flow-arrow-4"/>
+          <p:cNvPr id="969005389" name="flow-arrow-4"/>
           <p:cNvSpPr>
             <a:spLocks noGrp="1"/>
           </p:cNvSpPr>
@@ -13503,7 +13503,7 @@
       </p:sp>
       <p:sp>
         <p:nvSpPr>
-          <p:cNvPr id="1214044010" name="icon"/>
+          <p:cNvPr id="412803667" name="icon"/>
           <p:cNvSpPr>
             <a:spLocks noGrp="1"/>
           </p:cNvSpPr>
@@ -13553,7 +13553,7 @@
       </p:sp>
       <p:sp>
         <p:nvSpPr>
-          <p:cNvPr id="1656807383" name="node-user-message"/>
+          <p:cNvPr id="2014459520" name="node-user-message"/>
           <p:cNvSpPr>
             <a:spLocks noGrp="1"/>
           </p:cNvSpPr>
@@ -13624,7 +13624,7 @@
       </p:sp>
       <p:sp>
         <p:nvSpPr>
-          <p:cNvPr id="1983030205" name="icon"/>
+          <p:cNvPr id="696446571" name="icon"/>
           <p:cNvSpPr>
             <a:spLocks noGrp="1"/>
           </p:cNvSpPr>
@@ -13674,7 +13674,7 @@
       </p:sp>
       <p:sp>
         <p:nvSpPr>
-          <p:cNvPr id="758982502" name="node-llm"/>
+          <p:cNvPr id="793434872" name="node-llm"/>
           <p:cNvSpPr>
             <a:spLocks noGrp="1"/>
           </p:cNvSpPr>
@@ -13726,7 +13726,7 @@
       </p:sp>
       <p:sp>
         <p:nvSpPr>
-          <p:cNvPr id="1173333315" name="icon"/>
+          <p:cNvPr id="79298351" name="icon"/>
           <p:cNvSpPr>
             <a:spLocks noGrp="1"/>
           </p:cNvSpPr>
@@ -13776,7 +13776,7 @@
       </p:sp>
       <p:sp>
         <p:nvSpPr>
-          <p:cNvPr id="877755722" name="node-decision"/>
+          <p:cNvPr id="423227940" name="node-decision"/>
           <p:cNvSpPr>
             <a:spLocks noGrp="1"/>
           </p:cNvSpPr>
@@ -13828,7 +13828,7 @@
       </p:sp>
       <p:sp>
         <p:nvSpPr>
-          <p:cNvPr id="1438353552" name="icon"/>
+          <p:cNvPr id="708924965" name="icon"/>
           <p:cNvSpPr>
             <a:spLocks noGrp="1"/>
           </p:cNvSpPr>
@@ -13878,7 +13878,7 @@
       </p:sp>
       <p:sp>
         <p:nvSpPr>
-          <p:cNvPr id="1665117424" name="node-tool-execution"/>
+          <p:cNvPr id="2005283429" name="node-tool-execution"/>
           <p:cNvSpPr>
             <a:spLocks noGrp="1"/>
           </p:cNvSpPr>
@@ -13949,7 +13949,7 @@
       </p:sp>
       <p:sp>
         <p:nvSpPr>
-          <p:cNvPr id="1275422028" name="icon"/>
+          <p:cNvPr id="1446525465" name="icon"/>
           <p:cNvSpPr>
             <a:spLocks noGrp="1"/>
           </p:cNvSpPr>
@@ -13999,7 +13999,7 @@
       </p:sp>
       <p:sp>
         <p:nvSpPr>
-          <p:cNvPr id="754435143" name="node-system-change"/>
+          <p:cNvPr id="492982758" name="node-system-change"/>
           <p:cNvSpPr>
             <a:spLocks noGrp="1"/>
           </p:cNvSpPr>
@@ -14070,7 +14070,7 @@
       </p:sp>
       <p:sp>
         <p:nvSpPr>
-          <p:cNvPr id="1927245821" name="action-drop-line"/>
+          <p:cNvPr id="758052936" name="action-drop-line"/>
           <p:cNvSpPr>
             <a:spLocks noGrp="1"/>
           </p:cNvSpPr>
@@ -14095,7 +14095,7 @@
       </p:sp>
       <p:sp>
         <p:nvSpPr>
-          <p:cNvPr id="2047121504" name="icon"/>
+          <p:cNvPr id="737407534" name="icon"/>
           <p:cNvSpPr>
             <a:spLocks noGrp="1"/>
           </p:cNvSpPr>
@@ -14145,7 +14145,7 @@
       </p:sp>
       <p:sp>
         <p:nvSpPr>
-          <p:cNvPr id="83755000" name="icon"/>
+          <p:cNvPr id="1939755952" name="icon"/>
           <p:cNvSpPr>
             <a:spLocks noGrp="1"/>
           </p:cNvSpPr>
@@ -14195,7 +14195,7 @@
       </p:sp>
       <p:sp>
         <p:nvSpPr>
-          <p:cNvPr id="1043928706" name="icon"/>
+          <p:cNvPr id="74921136" name="icon"/>
           <p:cNvSpPr>
             <a:spLocks noGrp="1"/>
           </p:cNvSpPr>
@@ -14245,7 +14245,7 @@
       </p:sp>
       <p:sp>
         <p:nvSpPr>
-          <p:cNvPr id="95041374" name=""/>
+          <p:cNvPr id="1105041697" name=""/>
           <p:cNvSpPr>
             <a:spLocks noGrp="1"/>
           </p:cNvSpPr>
@@ -14291,7 +14291,7 @@
       </p:sp>
       <p:sp>
         <p:nvSpPr>
-          <p:cNvPr id="898651462" name=""/>
+          <p:cNvPr id="1069465319" name=""/>
           <p:cNvSpPr>
             <a:spLocks noGrp="1"/>
           </p:cNvSpPr>
@@ -14337,7 +14337,7 @@
       </p:sp>
       <p:sp>
         <p:nvSpPr>
-          <p:cNvPr id="1109463412" name=""/>
+          <p:cNvPr id="969714966" name=""/>
           <p:cNvSpPr>
             <a:spLocks noGrp="1"/>
           </p:cNvSpPr>
@@ -14416,7 +14416,7 @@
       </p:grpSpPr>
       <p:sp>
         <p:nvSpPr>
-          <p:cNvPr id="1944177884" name="Rectangle 1921889684"/>
+          <p:cNvPr id="396543663" name="Rectangle 1921889684"/>
           <p:cNvSpPr>
             <a:spLocks noGrp="1"/>
           </p:cNvSpPr>
@@ -14468,7 +14468,7 @@
       </p:sp>
       <p:sp>
         <p:nvSpPr>
-          <p:cNvPr id="1277405157" name="Rectangle 1785225236"/>
+          <p:cNvPr id="32805795" name="Rectangle 1785225236"/>
           <p:cNvSpPr>
             <a:spLocks noGrp="1"/>
           </p:cNvSpPr>
@@ -14520,7 +14520,7 @@
       </p:sp>
       <p:sp>
         <p:nvSpPr>
-          <p:cNvPr id="1030835920" name="Rectangle 1785225237"/>
+          <p:cNvPr id="1338132005" name="Rectangle 1785225237"/>
           <p:cNvSpPr>
             <a:spLocks noGrp="1"/>
           </p:cNvSpPr>
@@ -14572,7 +14572,7 @@
       </p:sp>
       <p:sp>
         <p:nvSpPr>
-          <p:cNvPr id="509133583" name="security-canvas"/>
+          <p:cNvPr id="1962574903" name="security-canvas"/>
           <p:cNvSpPr>
             <a:spLocks noGrp="1"/>
           </p:cNvSpPr>
@@ -14607,7 +14607,7 @@
       </p:sp>
       <p:sp>
         <p:nvSpPr>
-          <p:cNvPr id="34161505" name="vertical-divider"/>
+          <p:cNvPr id="673073221" name="vertical-divider"/>
           <p:cNvSpPr>
             <a:spLocks noGrp="1"/>
           </p:cNvSpPr>
@@ -14632,7 +14632,7 @@
       </p:sp>
       <p:sp>
         <p:nvSpPr>
-          <p:cNvPr id="1877329082" name="horizontal-divider"/>
+          <p:cNvPr id="708026931" name="horizontal-divider"/>
           <p:cNvSpPr>
             <a:spLocks noGrp="1"/>
           </p:cNvSpPr>
@@ -14657,7 +14657,7 @@
       </p:sp>
       <p:sp>
         <p:nvSpPr>
-          <p:cNvPr id="735825011" name="icon"/>
+          <p:cNvPr id="1314031481" name="icon"/>
           <p:cNvSpPr>
             <a:spLocks noGrp="1"/>
           </p:cNvSpPr>
@@ -14707,7 +14707,7 @@
       </p:sp>
       <p:sp>
         <p:nvSpPr>
-          <p:cNvPr id="1785381828" name=""/>
+          <p:cNvPr id="492269582" name=""/>
           <p:cNvSpPr>
             <a:spLocks noGrp="1"/>
           </p:cNvSpPr>
@@ -14753,7 +14753,7 @@
       </p:sp>
       <p:sp>
         <p:nvSpPr>
-          <p:cNvPr id="774830478" name=""/>
+          <p:cNvPr id="1907443964" name=""/>
           <p:cNvSpPr>
             <a:spLocks noGrp="1"/>
           </p:cNvSpPr>
@@ -14799,7 +14799,7 @@
       </p:sp>
       <p:sp>
         <p:nvSpPr>
-          <p:cNvPr id="504644911" name="icon"/>
+          <p:cNvPr id="318811407" name="icon"/>
           <p:cNvSpPr>
             <a:spLocks noGrp="1"/>
           </p:cNvSpPr>
@@ -14849,7 +14849,7 @@
       </p:sp>
       <p:sp>
         <p:nvSpPr>
-          <p:cNvPr id="1168115301" name=""/>
+          <p:cNvPr id="1188609235" name=""/>
           <p:cNvSpPr>
             <a:spLocks noGrp="1"/>
           </p:cNvSpPr>
@@ -14895,7 +14895,7 @@
       </p:sp>
       <p:sp>
         <p:nvSpPr>
-          <p:cNvPr id="660237928" name=""/>
+          <p:cNvPr id="1549236881" name=""/>
           <p:cNvSpPr>
             <a:spLocks noGrp="1"/>
           </p:cNvSpPr>
@@ -14941,7 +14941,7 @@
       </p:sp>
       <p:sp>
         <p:nvSpPr>
-          <p:cNvPr id="1070528497" name="icon"/>
+          <p:cNvPr id="962074368" name="icon"/>
           <p:cNvSpPr>
             <a:spLocks noGrp="1"/>
           </p:cNvSpPr>
@@ -14991,7 +14991,7 @@
       </p:sp>
       <p:sp>
         <p:nvSpPr>
-          <p:cNvPr id="1336016408" name=""/>
+          <p:cNvPr id="942584535" name=""/>
           <p:cNvSpPr>
             <a:spLocks noGrp="1"/>
           </p:cNvSpPr>
@@ -15037,7 +15037,7 @@
       </p:sp>
       <p:sp>
         <p:nvSpPr>
-          <p:cNvPr id="782692693" name=""/>
+          <p:cNvPr id="1192212633" name=""/>
           <p:cNvSpPr>
             <a:spLocks noGrp="1"/>
           </p:cNvSpPr>
@@ -15083,7 +15083,7 @@
       </p:sp>
       <p:sp>
         <p:nvSpPr>
-          <p:cNvPr id="1836042677" name="icon"/>
+          <p:cNvPr id="736783158" name="icon"/>
           <p:cNvSpPr>
             <a:spLocks noGrp="1"/>
           </p:cNvSpPr>
@@ -15133,7 +15133,7 @@
       </p:sp>
       <p:sp>
         <p:nvSpPr>
-          <p:cNvPr id="1068732437" name=""/>
+          <p:cNvPr id="1956858753" name=""/>
           <p:cNvSpPr>
             <a:spLocks noGrp="1"/>
           </p:cNvSpPr>
@@ -15179,7 +15179,7 @@
       </p:sp>
       <p:sp>
         <p:nvSpPr>
-          <p:cNvPr id="1337478154" name=""/>
+          <p:cNvPr id="1957157678" name=""/>
           <p:cNvSpPr>
             <a:spLocks noGrp="1"/>
           </p:cNvSpPr>
@@ -15258,7 +15258,7 @@
       </p:grpSpPr>
       <p:sp>
         <p:nvSpPr>
-          <p:cNvPr id="110848936" name="Rectangle 935271156"/>
+          <p:cNvPr id="947491479" name="Rectangle 935271156"/>
           <p:cNvSpPr>
             <a:spLocks noGrp="1"/>
           </p:cNvSpPr>
@@ -15304,7 +15304,7 @@
       </p:sp>
       <p:sp>
         <p:nvSpPr>
-          <p:cNvPr id="1061077193" name="Rectangle 251777344"/>
+          <p:cNvPr id="1682395700" name="Rectangle 251777344"/>
           <p:cNvSpPr>
             <a:spLocks noGrp="1"/>
           </p:cNvSpPr>
@@ -15350,7 +15350,7 @@
       </p:sp>
       <p:sp>
         <p:nvSpPr>
-          <p:cNvPr id="2095930878" name="Rectangle 1495975732"/>
+          <p:cNvPr id="678441748" name="Rectangle 1495975732"/>
           <p:cNvSpPr>
             <a:spLocks noGrp="1"/>
           </p:cNvSpPr>
@@ -15402,7 +15402,7 @@
       </p:sp>
       <p:sp>
         <p:nvSpPr>
-          <p:cNvPr id="1311871551" name="security-canvas"/>
+          <p:cNvPr id="1364932580" name="security-canvas"/>
           <p:cNvSpPr>
             <a:spLocks noGrp="1"/>
           </p:cNvSpPr>
@@ -15437,7 +15437,7 @@
       </p:sp>
       <p:sp>
         <p:nvSpPr>
-          <p:cNvPr id="1638407453" name="hallucination-arrow-1"/>
+          <p:cNvPr id="866895669" name="hallucination-arrow-1"/>
           <p:cNvSpPr>
             <a:spLocks noGrp="1"/>
           </p:cNvSpPr>
@@ -15467,7 +15467,7 @@
       </p:sp>
       <p:sp>
         <p:nvSpPr>
-          <p:cNvPr id="1329755114" name="hallucination-arrow-2"/>
+          <p:cNvPr id="1418932730" name="hallucination-arrow-2"/>
           <p:cNvSpPr>
             <a:spLocks noGrp="1"/>
           </p:cNvSpPr>
@@ -15497,7 +15497,7 @@
       </p:sp>
       <p:sp>
         <p:nvSpPr>
-          <p:cNvPr id="360018919" name="hallucination-arrow-3"/>
+          <p:cNvPr id="650993935" name="hallucination-arrow-3"/>
           <p:cNvSpPr>
             <a:spLocks noGrp="1"/>
           </p:cNvSpPr>
@@ -15527,7 +15527,7 @@
       </p:sp>
       <p:sp>
         <p:nvSpPr>
-          <p:cNvPr id="1834484346" name="node-llm-output"/>
+          <p:cNvPr id="1969762799" name="node-llm-output"/>
           <p:cNvSpPr>
             <a:spLocks noGrp="1"/>
           </p:cNvSpPr>
@@ -15598,7 +15598,7 @@
       </p:sp>
       <p:sp>
         <p:nvSpPr>
-          <p:cNvPr id="2038871855" name="node-fake-command"/>
+          <p:cNvPr id="325320534" name="node-fake-command"/>
           <p:cNvSpPr>
             <a:spLocks noGrp="1"/>
           </p:cNvSpPr>
@@ -15669,7 +15669,7 @@
       </p:sp>
       <p:sp>
         <p:nvSpPr>
-          <p:cNvPr id="300907021" name="node-administrator"/>
+          <p:cNvPr id="456977369" name="node-administrator"/>
           <p:cNvSpPr>
             <a:spLocks noGrp="1"/>
           </p:cNvSpPr>
@@ -15721,7 +15721,7 @@
       </p:sp>
       <p:sp>
         <p:nvSpPr>
-          <p:cNvPr id="1830682090" name="node-system-failure"/>
+          <p:cNvPr id="363456155" name="node-system-failure"/>
           <p:cNvSpPr>
             <a:spLocks noGrp="1"/>
           </p:cNvSpPr>
@@ -15792,7 +15792,7 @@
       </p:sp>
       <p:sp>
         <p:nvSpPr>
-          <p:cNvPr id="1851605074" name=""/>
+          <p:cNvPr id="1214968134" name=""/>
           <p:cNvSpPr>
             <a:spLocks noGrp="1"/>
           </p:cNvSpPr>
@@ -15838,7 +15838,7 @@
       </p:sp>
       <p:sp>
         <p:nvSpPr>
-          <p:cNvPr id="755711518" name="correct-line"/>
+          <p:cNvPr id="1485153504" name="correct-line"/>
           <p:cNvSpPr>
             <a:spLocks noGrp="1"/>
           </p:cNvSpPr>
@@ -15863,7 +15863,7 @@
       </p:sp>
       <p:sp>
         <p:nvSpPr>
-          <p:cNvPr id="828049154" name="node-verified"/>
+          <p:cNvPr id="1024736921" name="node-verified"/>
           <p:cNvSpPr>
             <a:spLocks noGrp="1"/>
           </p:cNvSpPr>
@@ -15915,7 +15915,7 @@
       </p:sp>
       <p:sp>
         <p:nvSpPr>
-          <p:cNvPr id="1797246607" name=""/>
+          <p:cNvPr id="56970453" name=""/>
           <p:cNvSpPr>
             <a:spLocks noGrp="1"/>
           </p:cNvSpPr>
@@ -15961,7 +15961,7 @@
       </p:sp>
       <p:sp>
         <p:nvSpPr>
-          <p:cNvPr id="42217871" name="plausible-line"/>
+          <p:cNvPr id="1127731135" name="plausible-line"/>
           <p:cNvSpPr>
             <a:spLocks noGrp="1"/>
           </p:cNvSpPr>
@@ -15986,7 +15986,7 @@
       </p:sp>
       <p:sp>
         <p:nvSpPr>
-          <p:cNvPr id="1780314923" name="node-unverified"/>
+          <p:cNvPr id="751161746" name="node-unverified"/>
           <p:cNvSpPr>
             <a:spLocks noGrp="1"/>
           </p:cNvSpPr>
@@ -16038,7 +16038,7 @@
       </p:sp>
       <p:sp>
         <p:nvSpPr>
-          <p:cNvPr id="1056746409" name=""/>
+          <p:cNvPr id="600846455" name=""/>
           <p:cNvSpPr>
             <a:spLocks noGrp="1"/>
           </p:cNvSpPr>
@@ -16117,7 +16117,7 @@
       </p:grpSpPr>
       <p:sp>
         <p:nvSpPr>
-          <p:cNvPr id="764683890" name="Rectangle 7713821"/>
+          <p:cNvPr id="59821296" name="Rectangle 7713821"/>
           <p:cNvSpPr>
             <a:spLocks noGrp="1"/>
           </p:cNvSpPr>
@@ -16163,7 +16163,7 @@
       </p:sp>
       <p:sp>
         <p:nvSpPr>
-          <p:cNvPr id="1134880345" name="Rectangle 1381388514"/>
+          <p:cNvPr id="20545442" name="Rectangle 1381388514"/>
           <p:cNvSpPr>
             <a:spLocks noGrp="1"/>
           </p:cNvSpPr>
@@ -16209,7 +16209,7 @@
       </p:sp>
       <p:sp>
         <p:nvSpPr>
-          <p:cNvPr id="908044771" name="Rectangle 181180573"/>
+          <p:cNvPr id="75272391" name="Rectangle 181180573"/>
           <p:cNvSpPr>
             <a:spLocks noGrp="1"/>
           </p:cNvSpPr>
@@ -16261,7 +16261,7 @@
       </p:sp>
       <p:sp>
         <p:nvSpPr>
-          <p:cNvPr id="2139619916" name="security-canvas"/>
+          <p:cNvPr id="1109423838" name="security-canvas"/>
           <p:cNvSpPr>
             <a:spLocks noGrp="1"/>
           </p:cNvSpPr>
@@ -16296,7 +16296,7 @@
       </p:sp>
       <p:sp>
         <p:nvSpPr>
-          <p:cNvPr id="1431197582" name="trusted-instruction-arrow"/>
+          <p:cNvPr id="7730358" name="trusted-instruction-arrow"/>
           <p:cNvSpPr>
             <a:spLocks noGrp="1"/>
           </p:cNvSpPr>
@@ -16326,7 +16326,7 @@
       </p:sp>
       <p:sp>
         <p:nvSpPr>
-          <p:cNvPr id="180659234" name="untrusted-content-arrow"/>
+          <p:cNvPr id="760684566" name="untrusted-content-arrow"/>
           <p:cNvSpPr>
             <a:spLocks noGrp="1"/>
           </p:cNvSpPr>
@@ -16356,7 +16356,7 @@
       </p:sp>
       <p:sp>
         <p:nvSpPr>
-          <p:cNvPr id="971334156" name="injection-outcome-arrow"/>
+          <p:cNvPr id="269631337" name="injection-outcome-arrow"/>
           <p:cNvSpPr>
             <a:spLocks noGrp="1"/>
           </p:cNvSpPr>
@@ -16386,7 +16386,7 @@
       </p:sp>
       <p:sp>
         <p:nvSpPr>
-          <p:cNvPr id="416227788" name="trusted-system-instruction"/>
+          <p:cNvPr id="913860793" name="trusted-system-instruction"/>
           <p:cNvSpPr>
             <a:spLocks noGrp="1"/>
           </p:cNvSpPr>
@@ -16455,7 +16455,7 @@
       </p:sp>
       <p:sp>
         <p:nvSpPr>
-          <p:cNvPr id="1506299473" name="prompt-injection-llm"/>
+          <p:cNvPr id="1830760169" name="prompt-injection-llm"/>
           <p:cNvSpPr>
             <a:spLocks noGrp="1"/>
           </p:cNvSpPr>
@@ -16506,7 +16506,7 @@
       </p:sp>
       <p:sp>
         <p:nvSpPr>
-          <p:cNvPr id="630021584" name="untrusted-document-web-email"/>
+          <p:cNvPr id="1341139258" name="untrusted-document-web-email"/>
           <p:cNvSpPr>
             <a:spLocks noGrp="1"/>
           </p:cNvSpPr>
@@ -16575,7 +16575,7 @@
       </p:sp>
       <p:sp>
         <p:nvSpPr>
-          <p:cNvPr id="2124372608" name=""/>
+          <p:cNvPr id="677721040" name=""/>
           <p:cNvSpPr>
             <a:spLocks noGrp="1"/>
           </p:cNvSpPr>
@@ -16620,7 +16620,7 @@
       </p:sp>
       <p:sp>
         <p:nvSpPr>
-          <p:cNvPr id="2023934408" name="prompt-injection-data-exposure"/>
+          <p:cNvPr id="1280687453" name="prompt-injection-data-exposure"/>
           <p:cNvSpPr>
             <a:spLocks noGrp="1"/>
           </p:cNvSpPr>
@@ -16671,7 +16671,7 @@
       </p:sp>
       <p:sp>
         <p:nvSpPr>
-          <p:cNvPr id="718377228" name="prompt-injection-unauthorized-action"/>
+          <p:cNvPr id="219866656" name="prompt-injection-unauthorized-action"/>
           <p:cNvSpPr>
             <a:spLocks noGrp="1"/>
           </p:cNvSpPr>
@@ -16755,7 +16755,7 @@
       </p:grpSpPr>
       <p:sp>
         <p:nvSpPr>
-          <p:cNvPr id="978853637" name="Rectangle 1921889684"/>
+          <p:cNvPr id="81064406" name="Rectangle 1921889684"/>
           <p:cNvSpPr>
             <a:spLocks noGrp="1"/>
           </p:cNvSpPr>
@@ -16807,7 +16807,7 @@
       </p:sp>
       <p:sp>
         <p:nvSpPr>
-          <p:cNvPr id="1088664542" name="Rectangle 1785225236"/>
+          <p:cNvPr id="2078821998" name="Rectangle 1785225236"/>
           <p:cNvSpPr>
             <a:spLocks noGrp="1"/>
           </p:cNvSpPr>
@@ -16859,7 +16859,7 @@
       </p:sp>
       <p:sp>
         <p:nvSpPr>
-          <p:cNvPr id="2044378950" name="Rectangle 1785225237"/>
+          <p:cNvPr id="1952579436" name="Rectangle 1785225237"/>
           <p:cNvSpPr>
             <a:spLocks noGrp="1"/>
           </p:cNvSpPr>
@@ -16911,7 +16911,7 @@
       </p:sp>
       <p:sp>
         <p:nvSpPr>
-          <p:cNvPr id="641642192" name="security-canvas"/>
+          <p:cNvPr id="1905923561" name="security-canvas"/>
           <p:cNvSpPr>
             <a:spLocks noGrp="1"/>
           </p:cNvSpPr>
@@ -16946,7 +16946,7 @@
       </p:sp>
       <p:sp>
         <p:nvSpPr>
-          <p:cNvPr id="1725728911" name="comparison-divider"/>
+          <p:cNvPr id="1030407203" name="comparison-divider"/>
           <p:cNvSpPr>
             <a:spLocks noGrp="1"/>
           </p:cNvSpPr>
@@ -16971,7 +16971,7 @@
       </p:sp>
       <p:sp>
         <p:nvSpPr>
-          <p:cNvPr id="1436018851" name=""/>
+          <p:cNvPr id="1368479080" name=""/>
           <p:cNvSpPr>
             <a:spLocks noGrp="1"/>
           </p:cNvSpPr>
@@ -17017,7 +17017,7 @@
       </p:sp>
       <p:sp>
         <p:nvSpPr>
-          <p:cNvPr id="1158132491" name="chatbot-arrow"/>
+          <p:cNvPr id="269342812" name="chatbot-arrow"/>
           <p:cNvSpPr>
             <a:spLocks noGrp="1"/>
           </p:cNvSpPr>
@@ -17047,7 +17047,7 @@
       </p:sp>
       <p:sp>
         <p:nvSpPr>
-          <p:cNvPr id="940909112" name="node-chatbot"/>
+          <p:cNvPr id="453110502" name="node-chatbot"/>
           <p:cNvSpPr>
             <a:spLocks noGrp="1"/>
           </p:cNvSpPr>
@@ -17099,7 +17099,7 @@
       </p:sp>
       <p:sp>
         <p:nvSpPr>
-          <p:cNvPr id="333515550" name="node-text-output"/>
+          <p:cNvPr id="544406355" name="node-text-output"/>
           <p:cNvSpPr>
             <a:spLocks noGrp="1"/>
           </p:cNvSpPr>
@@ -17170,7 +17170,7 @@
       </p:sp>
       <p:sp>
         <p:nvSpPr>
-          <p:cNvPr id="663170373" name=""/>
+          <p:cNvPr id="997874523" name=""/>
           <p:cNvSpPr>
             <a:spLocks noGrp="1"/>
           </p:cNvSpPr>
@@ -17216,32 +17216,7 @@
       </p:sp>
       <p:sp>
         <p:nvSpPr>
-          <p:cNvPr id="1339953855" name="permission-radius"/>
-          <p:cNvSpPr>
-            <a:spLocks noGrp="1"/>
-          </p:cNvSpPr>
-          <p:nvPr/>
-        </p:nvSpPr>
-        <p:spPr bwMode="auto">
-          <a:xfrm>
-            <a:off x="6496049" y="2152649"/>
-            <a:ext cx="4514850" cy="2990849"/>
-          </a:xfrm>
-          <a:prstGeom prst="ellipse">
-            <a:avLst/>
-          </a:prstGeom>
-          <a:noFill/>
-          <a:ln w="38100">
-            <a:solidFill>
-              <a:srgbClr val="DC2626"/>
-            </a:solidFill>
-            <a:prstDash val="solid"/>
-          </a:ln>
-        </p:spPr>
-      </p:sp>
-      <p:sp>
-        <p:nvSpPr>
-          <p:cNvPr id="1529629394" name="agent-arrow-1"/>
+          <p:cNvPr id="194323263" name="agent-arrow-1"/>
           <p:cNvSpPr>
             <a:spLocks noGrp="1"/>
           </p:cNvSpPr>
@@ -17271,7 +17246,7 @@
       </p:sp>
       <p:sp>
         <p:nvSpPr>
-          <p:cNvPr id="838643665" name="agent-arrow-2"/>
+          <p:cNvPr id="597267023" name="agent-arrow-2"/>
           <p:cNvSpPr>
             <a:spLocks noGrp="1"/>
           </p:cNvSpPr>
@@ -17301,7 +17276,7 @@
       </p:sp>
       <p:sp>
         <p:nvSpPr>
-          <p:cNvPr id="864423161" name="agent-arrow-3"/>
+          <p:cNvPr id="1401799076" name="agent-arrow-3"/>
           <p:cNvSpPr>
             <a:spLocks noGrp="1"/>
           </p:cNvSpPr>
@@ -17331,7 +17306,7 @@
       </p:sp>
       <p:sp>
         <p:nvSpPr>
-          <p:cNvPr id="226586122" name="agent-arrow-4"/>
+          <p:cNvPr id="1676464046" name="agent-arrow-4"/>
           <p:cNvSpPr>
             <a:spLocks noGrp="1"/>
           </p:cNvSpPr>
@@ -17361,7 +17336,7 @@
       </p:sp>
       <p:sp>
         <p:nvSpPr>
-          <p:cNvPr id="981182813" name="node-agent"/>
+          <p:cNvPr id="913746750" name="node-agent"/>
           <p:cNvSpPr>
             <a:spLocks noGrp="1"/>
           </p:cNvSpPr>
@@ -17413,7 +17388,7 @@
       </p:sp>
       <p:sp>
         <p:nvSpPr>
-          <p:cNvPr id="658874629" name="node-web"/>
+          <p:cNvPr id="1243464707" name="node-web"/>
           <p:cNvSpPr>
             <a:spLocks noGrp="1"/>
           </p:cNvSpPr>
@@ -17465,7 +17440,7 @@
       </p:sp>
       <p:sp>
         <p:nvSpPr>
-          <p:cNvPr id="149974877" name="node-term"/>
+          <p:cNvPr id="1900209353" name="node-term"/>
           <p:cNvSpPr>
             <a:spLocks noGrp="1"/>
           </p:cNvSpPr>
@@ -17517,7 +17492,7 @@
       </p:sp>
       <p:sp>
         <p:nvSpPr>
-          <p:cNvPr id="2000678468" name="node-mail"/>
+          <p:cNvPr id="844047417" name="node-mail"/>
           <p:cNvSpPr>
             <a:spLocks noGrp="1"/>
           </p:cNvSpPr>
@@ -17569,7 +17544,7 @@
       </p:sp>
       <p:sp>
         <p:nvSpPr>
-          <p:cNvPr id="1601623847" name="node-db"/>
+          <p:cNvPr id="1012960551" name="node-db"/>
           <p:cNvSpPr>
             <a:spLocks noGrp="1"/>
           </p:cNvSpPr>
@@ -17621,7 +17596,7 @@
       </p:sp>
       <p:sp>
         <p:nvSpPr>
-          <p:cNvPr id="621582854" name=""/>
+          <p:cNvPr id="1435354301" name=""/>
           <p:cNvSpPr>
             <a:spLocks noGrp="1"/>
           </p:cNvSpPr>
@@ -17700,7 +17675,7 @@
       </p:grpSpPr>
       <p:sp>
         <p:nvSpPr>
-          <p:cNvPr id="1259152869" name="Rectangle 7713821"/>
+          <p:cNvPr id="1502021006" name="Rectangle 7713821"/>
           <p:cNvSpPr>
             <a:spLocks noGrp="1"/>
           </p:cNvSpPr>
@@ -17746,7 +17721,7 @@
       </p:sp>
       <p:sp>
         <p:nvSpPr>
-          <p:cNvPr id="1537437701" name="Rectangle 1381388514"/>
+          <p:cNvPr id="1868076551" name="Rectangle 1381388514"/>
           <p:cNvSpPr>
             <a:spLocks noGrp="1"/>
           </p:cNvSpPr>
@@ -17792,7 +17767,7 @@
       </p:sp>
       <p:sp>
         <p:nvSpPr>
-          <p:cNvPr id="2063717280" name="Rectangle 181180573"/>
+          <p:cNvPr id="298984760" name="Rectangle 181180573"/>
           <p:cNvSpPr>
             <a:spLocks noGrp="1"/>
           </p:cNvSpPr>
@@ -17844,7 +17819,7 @@
       </p:sp>
       <p:sp>
         <p:nvSpPr>
-          <p:cNvPr id="1361873747" name="security-canvas"/>
+          <p:cNvPr id="995629520" name="security-canvas"/>
           <p:cNvSpPr>
             <a:spLocks noGrp="1"/>
           </p:cNvSpPr>
@@ -17879,7 +17854,7 @@
       </p:sp>
       <p:sp>
         <p:nvSpPr>
-          <p:cNvPr id="164737986" name="timeline"/>
+          <p:cNvPr id="919502795" name="timeline"/>
           <p:cNvSpPr>
             <a:spLocks noGrp="1"/>
           </p:cNvSpPr>
@@ -17904,7 +17879,7 @@
       </p:sp>
       <p:sp>
         <p:nvSpPr>
-          <p:cNvPr id="922942155" name="timeline-dot-1"/>
+          <p:cNvPr id="1894290555" name="timeline-dot-1"/>
           <p:cNvSpPr>
             <a:spLocks noGrp="1"/>
           </p:cNvSpPr>
@@ -17931,7 +17906,7 @@
       </p:sp>
       <p:sp>
         <p:nvSpPr>
-          <p:cNvPr id="1277447634" name=""/>
+          <p:cNvPr id="186000906" name=""/>
           <p:cNvSpPr>
             <a:spLocks noGrp="1"/>
           </p:cNvSpPr>
@@ -17977,7 +17952,7 @@
       </p:sp>
       <p:sp>
         <p:nvSpPr>
-          <p:cNvPr id="868904704" name="node-captcha-deception"/>
+          <p:cNvPr id="1564903065" name="node-captcha-deception"/>
           <p:cNvSpPr>
             <a:spLocks noGrp="1"/>
           </p:cNvSpPr>
@@ -18029,7 +18004,7 @@
       </p:sp>
       <p:sp>
         <p:nvSpPr>
-          <p:cNvPr id="1194739216" name=""/>
+          <p:cNvPr id="606671620" name=""/>
           <p:cNvSpPr>
             <a:spLocks noGrp="1"/>
           </p:cNvSpPr>
@@ -18075,7 +18050,7 @@
       </p:sp>
       <p:sp>
         <p:nvSpPr>
-          <p:cNvPr id="2050006483" name=""/>
+          <p:cNvPr id="1960351272" name=""/>
           <p:cNvSpPr>
             <a:spLocks noGrp="1"/>
           </p:cNvSpPr>
@@ -18121,7 +18096,7 @@
       </p:sp>
       <p:sp>
         <p:nvSpPr>
-          <p:cNvPr id="46874400" name="timeline-dot-2"/>
+          <p:cNvPr id="196804700" name="timeline-dot-2"/>
           <p:cNvSpPr>
             <a:spLocks noGrp="1"/>
           </p:cNvSpPr>
@@ -18148,7 +18123,7 @@
       </p:sp>
       <p:sp>
         <p:nvSpPr>
-          <p:cNvPr id="348613210" name=""/>
+          <p:cNvPr id="609390527" name=""/>
           <p:cNvSpPr>
             <a:spLocks noGrp="1"/>
           </p:cNvSpPr>
@@ -18194,7 +18169,7 @@
       </p:sp>
       <p:sp>
         <p:nvSpPr>
-          <p:cNvPr id="1974027680" name="node-monitoring-disabled"/>
+          <p:cNvPr id="2135545968" name="node-monitoring-disabled"/>
           <p:cNvSpPr>
             <a:spLocks noGrp="1"/>
           </p:cNvSpPr>
@@ -18265,7 +18240,7 @@
       </p:sp>
       <p:sp>
         <p:nvSpPr>
-          <p:cNvPr id="1694507182" name=""/>
+          <p:cNvPr id="1758401695" name=""/>
           <p:cNvSpPr>
             <a:spLocks noGrp="1"/>
           </p:cNvSpPr>
@@ -18311,7 +18286,7 @@
       </p:sp>
       <p:sp>
         <p:nvSpPr>
-          <p:cNvPr id="819743875" name=""/>
+          <p:cNvPr id="714178629" name=""/>
           <p:cNvSpPr>
             <a:spLocks noGrp="1"/>
           </p:cNvSpPr>
@@ -18357,7 +18332,7 @@
       </p:sp>
       <p:sp>
         <p:nvSpPr>
-          <p:cNvPr id="1698977667" name="timeline-dot-3"/>
+          <p:cNvPr id="512845760" name="timeline-dot-3"/>
           <p:cNvSpPr>
             <a:spLocks noGrp="1"/>
           </p:cNvSpPr>
@@ -18384,7 +18359,7 @@
       </p:sp>
       <p:sp>
         <p:nvSpPr>
-          <p:cNvPr id="1668004317" name=""/>
+          <p:cNvPr id="1983717244" name=""/>
           <p:cNvSpPr>
             <a:spLocks noGrp="1"/>
           </p:cNvSpPr>
@@ -18430,7 +18405,7 @@
       </p:sp>
       <p:sp>
         <p:nvSpPr>
-          <p:cNvPr id="1290165573" name="node-blackmail-scenario"/>
+          <p:cNvPr id="906310844" name="node-blackmail-scenario"/>
           <p:cNvSpPr>
             <a:spLocks noGrp="1"/>
           </p:cNvSpPr>
@@ -18501,7 +18476,7 @@
       </p:sp>
       <p:sp>
         <p:nvSpPr>
-          <p:cNvPr id="54970450" name=""/>
+          <p:cNvPr id="667643642" name=""/>
           <p:cNvSpPr>
             <a:spLocks noGrp="1"/>
           </p:cNvSpPr>
@@ -18547,7 +18522,7 @@
       </p:sp>
       <p:sp>
         <p:nvSpPr>
-          <p:cNvPr id="1572645046" name=""/>
+          <p:cNvPr id="1649288363" name=""/>
           <p:cNvSpPr>
             <a:spLocks noGrp="1"/>
           </p:cNvSpPr>
@@ -18593,7 +18568,7 @@
       </p:sp>
       <p:sp>
         <p:nvSpPr>
-          <p:cNvPr id="1291980528" name="timeline-dot-4"/>
+          <p:cNvPr id="165319076" name="timeline-dot-4"/>
           <p:cNvSpPr>
             <a:spLocks noGrp="1"/>
           </p:cNvSpPr>
@@ -18620,7 +18595,7 @@
       </p:sp>
       <p:sp>
         <p:nvSpPr>
-          <p:cNvPr id="2003026315" name=""/>
+          <p:cNvPr id="545480119" name=""/>
           <p:cNvSpPr>
             <a:spLocks noGrp="1"/>
           </p:cNvSpPr>
@@ -18666,7 +18641,7 @@
       </p:sp>
       <p:sp>
         <p:nvSpPr>
-          <p:cNvPr id="637402450" name="node-sandbox-escape"/>
+          <p:cNvPr id="1236670407" name="node-sandbox-escape"/>
           <p:cNvSpPr>
             <a:spLocks noGrp="1"/>
           </p:cNvSpPr>
@@ -18737,7 +18712,7 @@
       </p:sp>
       <p:sp>
         <p:nvSpPr>
-          <p:cNvPr id="1790420787" name=""/>
+          <p:cNvPr id="115290081" name=""/>
           <p:cNvSpPr>
             <a:spLocks noGrp="1"/>
           </p:cNvSpPr>
@@ -18783,7 +18758,7 @@
       </p:sp>
       <p:sp>
         <p:nvSpPr>
-          <p:cNvPr id="1474725205" name=""/>
+          <p:cNvPr id="1499419886" name=""/>
           <p:cNvSpPr>
             <a:spLocks noGrp="1"/>
           </p:cNvSpPr>
@@ -18829,7 +18804,7 @@
       </p:sp>
       <p:sp>
         <p:nvSpPr>
-          <p:cNvPr id="193761825" name="timeline-dot-5"/>
+          <p:cNvPr id="2077856549" name="timeline-dot-5"/>
           <p:cNvSpPr>
             <a:spLocks noGrp="1"/>
           </p:cNvSpPr>
@@ -18856,7 +18831,7 @@
       </p:sp>
       <p:sp>
         <p:nvSpPr>
-          <p:cNvPr id="65854637" name=""/>
+          <p:cNvPr id="802839831" name=""/>
           <p:cNvSpPr>
             <a:spLocks noGrp="1"/>
           </p:cNvSpPr>
@@ -18902,7 +18877,7 @@
       </p:sp>
       <p:sp>
         <p:nvSpPr>
-          <p:cNvPr id="1972225149" name="node-external-system-access"/>
+          <p:cNvPr id="1381091738" name="node-external-system-access"/>
           <p:cNvSpPr>
             <a:spLocks noGrp="1"/>
           </p:cNvSpPr>
@@ -18973,7 +18948,7 @@
       </p:sp>
       <p:sp>
         <p:nvSpPr>
-          <p:cNvPr id="2142393912" name=""/>
+          <p:cNvPr id="1612062203" name=""/>
           <p:cNvSpPr>
             <a:spLocks noGrp="1"/>
           </p:cNvSpPr>
@@ -19019,7 +18994,7 @@
       </p:sp>
       <p:sp>
         <p:nvSpPr>
-          <p:cNvPr id="554743826" name=""/>
+          <p:cNvPr id="1432490768" name=""/>
           <p:cNvSpPr>
             <a:spLocks noGrp="1"/>
           </p:cNvSpPr>
@@ -19065,7 +19040,7 @@
       </p:sp>
       <p:sp>
         <p:nvSpPr>
-          <p:cNvPr id="1410961537" name=""/>
+          <p:cNvPr id="1475199650" name=""/>
           <p:cNvSpPr>
             <a:spLocks noGrp="1"/>
           </p:cNvSpPr>
@@ -19111,7 +19086,7 @@
       </p:sp>
       <p:sp>
         <p:nvSpPr>
-          <p:cNvPr id="843362949" name=""/>
+          <p:cNvPr id="1497499568" name=""/>
           <p:cNvSpPr>
             <a:spLocks noGrp="1"/>
           </p:cNvSpPr>
@@ -19190,7 +19165,7 @@
       </p:grpSpPr>
       <p:sp>
         <p:nvSpPr>
-          <p:cNvPr id="1158188207" name="Rectangle 7713821"/>
+          <p:cNvPr id="1446898560" name="Rectangle 7713821"/>
           <p:cNvSpPr>
             <a:spLocks noGrp="1"/>
           </p:cNvSpPr>
@@ -19236,7 +19211,7 @@
       </p:sp>
       <p:sp>
         <p:nvSpPr>
-          <p:cNvPr id="311370897" name="Rectangle 1381388514"/>
+          <p:cNvPr id="317322851" name="Rectangle 1381388514"/>
           <p:cNvSpPr>
             <a:spLocks noGrp="1"/>
           </p:cNvSpPr>
@@ -19282,7 +19257,7 @@
       </p:sp>
       <p:sp>
         <p:nvSpPr>
-          <p:cNvPr id="1645404339" name="Rectangle 181180573"/>
+          <p:cNvPr id="735971275" name="Rectangle 181180573"/>
           <p:cNvSpPr>
             <a:spLocks noGrp="1"/>
           </p:cNvSpPr>
@@ -19334,7 +19309,7 @@
       </p:sp>
       <p:sp>
         <p:nvSpPr>
-          <p:cNvPr id="1316149745" name="case-1-canvas"/>
+          <p:cNvPr id="738217903" name="case-1-canvas"/>
           <p:cNvSpPr>
             <a:spLocks noGrp="1"/>
           </p:cNvSpPr>
@@ -19369,7 +19344,7 @@
       </p:sp>
       <p:sp>
         <p:nvSpPr>
-          <p:cNvPr id="1791106742" name="case-1-rule"/>
+          <p:cNvPr id="305725629" name="case-1-rule"/>
           <p:cNvSpPr>
             <a:spLocks noGrp="1"/>
           </p:cNvSpPr>
@@ -19396,7 +19371,7 @@
       </p:sp>
       <p:sp>
         <p:nvSpPr>
-          <p:cNvPr id="1477752134" name=""/>
+          <p:cNvPr id="1223467838" name=""/>
           <p:cNvSpPr>
             <a:spLocks noGrp="1"/>
           </p:cNvSpPr>
@@ -19442,7 +19417,7 @@
       </p:sp>
       <p:sp>
         <p:nvSpPr>
-          <p:cNvPr id="1598845906" name=""/>
+          <p:cNvPr id="580263191" name=""/>
           <p:cNvSpPr>
             <a:spLocks noGrp="1"/>
           </p:cNvSpPr>
@@ -19488,7 +19463,7 @@
       </p:sp>
       <p:sp>
         <p:nvSpPr>
-          <p:cNvPr id="65545405" name=""/>
+          <p:cNvPr id="1828852055" name=""/>
           <p:cNvSpPr>
             <a:spLocks noGrp="1"/>
           </p:cNvSpPr>
@@ -19534,7 +19509,7 @@
       </p:sp>
       <p:sp>
         <p:nvSpPr>
-          <p:cNvPr id="1297497935" name=""/>
+          <p:cNvPr id="301463833" name=""/>
           <p:cNvSpPr>
             <a:spLocks noGrp="1"/>
           </p:cNvSpPr>
@@ -19580,7 +19555,7 @@
       </p:sp>
       <p:sp>
         <p:nvSpPr>
-          <p:cNvPr id="839555556" name=""/>
+          <p:cNvPr id="418110494" name=""/>
           <p:cNvSpPr>
             <a:spLocks noGrp="1"/>
           </p:cNvSpPr>
@@ -19626,7 +19601,7 @@
       </p:sp>
       <p:sp>
         <p:nvSpPr>
-          <p:cNvPr id="1526639570" name=""/>
+          <p:cNvPr id="1320962138" name=""/>
           <p:cNvSpPr>
             <a:spLocks noGrp="1"/>
           </p:cNvSpPr>
@@ -19672,7 +19647,7 @@
       </p:sp>
       <p:sp>
         <p:nvSpPr>
-          <p:cNvPr id="1921656579" name=""/>
+          <p:cNvPr id="431642930" name=""/>
           <p:cNvSpPr>
             <a:spLocks noGrp="1"/>
           </p:cNvSpPr>
@@ -19737,7 +19712,7 @@
       </p:sp>
       <p:sp>
         <p:nvSpPr>
-          <p:cNvPr id="1179739419" name=""/>
+          <p:cNvPr id="46904295" name=""/>
           <p:cNvSpPr>
             <a:spLocks noGrp="1"/>
           </p:cNvSpPr>
@@ -19783,7 +19758,7 @@
       </p:sp>
       <p:sp>
         <p:nvSpPr>
-          <p:cNvPr id="2119380724" name="case-1-source-link"/>
+          <p:cNvPr id="1571099068" name="case-1-source-link"/>
           <p:cNvSpPr>
             <a:spLocks noGrp="1"/>
           </p:cNvSpPr>
@@ -19812,7 +19787,7 @@
       </p:sp>
       <p:sp>
         <p:nvSpPr>
-          <p:cNvPr id="1579286948" name=""/>
+          <p:cNvPr id="374167224" name=""/>
           <p:cNvSpPr>
             <a:spLocks noGrp="1"/>
           </p:cNvSpPr>
